--- a/courses/ooad/sessions/s11.pptx
+++ b/courses/ooad/sessions/s11.pptx
@@ -415,7 +415,7 @@
   </p:cSld>
   <p:clrMap bg1="lt1" tx1="dk1" bg2="lt2" tx2="dk2" accent1="accent1" accent2="accent2" accent3="accent3" accent4="accent4" accent5="accent5" accent6="accent6" hlink="hlink" folHlink="folHlink"/>
   <p:notesStyle>
-    <a:lvl1pPr marL="0" algn="l" defTabSz="914400" rtl="0" eaLnBrk="1" latinLnBrk="1" hangingPunct="1">
+    <a:lvl1pPr marL="0" algn="l" defTabSz="914400" rtl="0" eaLnBrk="1" latinLnBrk="0" hangingPunct="1">
       <a:defRPr sz="1200" kern="1200">
         <a:solidFill>
           <a:schemeClr val="tx1"/>
@@ -425,7 +425,7 @@
         <a:cs typeface="+mn-cs"/>
       </a:defRPr>
     </a:lvl1pPr>
-    <a:lvl2pPr marL="457200" algn="l" defTabSz="914400" rtl="0" eaLnBrk="1" latinLnBrk="1" hangingPunct="1">
+    <a:lvl2pPr marL="457200" algn="l" defTabSz="914400" rtl="0" eaLnBrk="1" latinLnBrk="0" hangingPunct="1">
       <a:defRPr sz="1200" kern="1200">
         <a:solidFill>
           <a:schemeClr val="tx1"/>
@@ -435,7 +435,7 @@
         <a:cs typeface="+mn-cs"/>
       </a:defRPr>
     </a:lvl2pPr>
-    <a:lvl3pPr marL="914400" algn="l" defTabSz="914400" rtl="0" eaLnBrk="1" latinLnBrk="1" hangingPunct="1">
+    <a:lvl3pPr marL="914400" algn="l" defTabSz="914400" rtl="0" eaLnBrk="1" latinLnBrk="0" hangingPunct="1">
       <a:defRPr sz="1200" kern="1200">
         <a:solidFill>
           <a:schemeClr val="tx1"/>
@@ -445,7 +445,7 @@
         <a:cs typeface="+mn-cs"/>
       </a:defRPr>
     </a:lvl3pPr>
-    <a:lvl4pPr marL="1371600" algn="l" defTabSz="914400" rtl="0" eaLnBrk="1" latinLnBrk="1" hangingPunct="1">
+    <a:lvl4pPr marL="1371600" algn="l" defTabSz="914400" rtl="0" eaLnBrk="1" latinLnBrk="0" hangingPunct="1">
       <a:defRPr sz="1200" kern="1200">
         <a:solidFill>
           <a:schemeClr val="tx1"/>
@@ -455,7 +455,7 @@
         <a:cs typeface="+mn-cs"/>
       </a:defRPr>
     </a:lvl4pPr>
-    <a:lvl5pPr marL="1828800" algn="l" defTabSz="914400" rtl="0" eaLnBrk="1" latinLnBrk="1" hangingPunct="1">
+    <a:lvl5pPr marL="1828800" algn="l" defTabSz="914400" rtl="0" eaLnBrk="1" latinLnBrk="0" hangingPunct="1">
       <a:defRPr sz="1200" kern="1200">
         <a:solidFill>
           <a:schemeClr val="tx1"/>
@@ -465,7 +465,7 @@
         <a:cs typeface="+mn-cs"/>
       </a:defRPr>
     </a:lvl5pPr>
-    <a:lvl6pPr marL="2286000" algn="l" defTabSz="914400" rtl="0" eaLnBrk="1" latinLnBrk="1" hangingPunct="1">
+    <a:lvl6pPr marL="2286000" algn="l" defTabSz="914400" rtl="0" eaLnBrk="1" latinLnBrk="0" hangingPunct="1">
       <a:defRPr sz="1200" kern="1200">
         <a:solidFill>
           <a:schemeClr val="tx1"/>
@@ -475,7 +475,7 @@
         <a:cs typeface="+mn-cs"/>
       </a:defRPr>
     </a:lvl6pPr>
-    <a:lvl7pPr marL="2743200" algn="l" defTabSz="914400" rtl="0" eaLnBrk="1" latinLnBrk="1" hangingPunct="1">
+    <a:lvl7pPr marL="2743200" algn="l" defTabSz="914400" rtl="0" eaLnBrk="1" latinLnBrk="0" hangingPunct="1">
       <a:defRPr sz="1200" kern="1200">
         <a:solidFill>
           <a:schemeClr val="tx1"/>
@@ -485,7 +485,7 @@
         <a:cs typeface="+mn-cs"/>
       </a:defRPr>
     </a:lvl7pPr>
-    <a:lvl8pPr marL="3200400" algn="l" defTabSz="914400" rtl="0" eaLnBrk="1" latinLnBrk="1" hangingPunct="1">
+    <a:lvl8pPr marL="3200400" algn="l" defTabSz="914400" rtl="0" eaLnBrk="1" latinLnBrk="0" hangingPunct="1">
       <a:defRPr sz="1200" kern="1200">
         <a:solidFill>
           <a:schemeClr val="tx1"/>
@@ -495,7 +495,7 @@
         <a:cs typeface="+mn-cs"/>
       </a:defRPr>
     </a:lvl8pPr>
-    <a:lvl9pPr marL="3657600" algn="l" defTabSz="914400" rtl="0" eaLnBrk="1" latinLnBrk="1" hangingPunct="1">
+    <a:lvl9pPr marL="3657600" algn="l" defTabSz="914400" rtl="0" eaLnBrk="1" latinLnBrk="0" hangingPunct="1">
       <a:defRPr sz="1200" kern="1200">
         <a:solidFill>
           <a:schemeClr val="tx1"/>
@@ -775,7 +775,7 @@
             <a:pPr lvl="0"/>
             <a:r>
               <a:rPr lang="ko-KR" sz="1200"/>
-              <a:t>인용 근거: Fairbanks(2010)의 책 소개 페이지 원문 확인(「02」와 같다). 위험 주도 모델(risk-driven model)의 세 단계다.</a:t>
+              <a:t>인용 근거: Fairbanks(2010)의 책 소개 페이지 원문 확인(「02. 모델의 가치」와 같다). 위험 주도 모델(risk-driven model)의 세 단계다.</a:t>
             </a:r>
           </a:p>
           <a:p>
@@ -918,7 +918,7 @@
             <a:pPr lvl="0"/>
             <a:r>
               <a:rPr lang="ko-KR" sz="1200"/>
-              <a:t>멈춘다는 것은 버린다는 뜻이 아니다. 코딩 중 새 위험이 보이면 다시 그린다 — 「07」의 빈틈이 그런 경우다.</a:t>
+              <a:t>멈춘다는 것은 버린다는 뜻이 아니다. 코딩 중 새 위험이 보이면 다시 그린다 — 「07. 통합이 드러낸 빈틈」의 빈틈이 그런 경우다.</a:t>
             </a:r>
           </a:p>
         </p:txBody>
@@ -1197,7 +1197,7 @@
             <a:pPr lvl="0"/>
             <a:r>
               <a:rPr lang="ko-KR" sz="1200"/>
-              <a:t>"작게 끝까지"(guides/sw-engineering-principles.md)가 이 관행의 반대다. 「07」의 빈틈도 끝까지 조립했기 때문에 보였다.</a:t>
+              <a:t>"작게 끝까지"(guides/sw-engineering-principles.md)가 이 관행의 반대다. 「07. 통합이 드러낸 빈틈」의 빈틈도 끝까지 조립했기 때문에 보였다.</a:t>
             </a:r>
           </a:p>
         </p:txBody>
@@ -3052,7 +3052,7 @@
   <p:hf hdr="0" ftr="0" dt="0"/>
   <p:txStyles>
     <p:titleStyle>
-      <a:lvl1pPr algn="l" rtl="0" eaLnBrk="0" fontAlgn="base" latinLnBrk="1" hangingPunct="0">
+      <a:lvl1pPr algn="l" rtl="0" eaLnBrk="0" fontAlgn="base" latinLnBrk="0" hangingPunct="0">
         <a:spcBef>
           <a:spcPct val="0"/>
         </a:spcBef>
@@ -3068,7 +3068,7 @@
           <a:cs typeface="+mj-cs"/>
         </a:defRPr>
       </a:lvl1pPr>
-      <a:lvl2pPr algn="l" rtl="0" eaLnBrk="0" fontAlgn="base" latinLnBrk="1" hangingPunct="0">
+      <a:lvl2pPr algn="l" rtl="0" eaLnBrk="0" fontAlgn="base" latinLnBrk="0" hangingPunct="0">
         <a:spcBef>
           <a:spcPct val="0"/>
         </a:spcBef>
@@ -3083,7 +3083,7 @@
           <a:ea typeface="맑은 고딕" pitchFamily="50" charset="-127"/>
         </a:defRPr>
       </a:lvl2pPr>
-      <a:lvl3pPr algn="l" rtl="0" eaLnBrk="0" fontAlgn="base" latinLnBrk="1" hangingPunct="0">
+      <a:lvl3pPr algn="l" rtl="0" eaLnBrk="0" fontAlgn="base" latinLnBrk="0" hangingPunct="0">
         <a:spcBef>
           <a:spcPct val="0"/>
         </a:spcBef>
@@ -3098,7 +3098,7 @@
           <a:ea typeface="맑은 고딕" pitchFamily="50" charset="-127"/>
         </a:defRPr>
       </a:lvl3pPr>
-      <a:lvl4pPr algn="l" rtl="0" eaLnBrk="0" fontAlgn="base" latinLnBrk="1" hangingPunct="0">
+      <a:lvl4pPr algn="l" rtl="0" eaLnBrk="0" fontAlgn="base" latinLnBrk="0" hangingPunct="0">
         <a:spcBef>
           <a:spcPct val="0"/>
         </a:spcBef>
@@ -3113,7 +3113,7 @@
           <a:ea typeface="맑은 고딕" pitchFamily="50" charset="-127"/>
         </a:defRPr>
       </a:lvl4pPr>
-      <a:lvl5pPr algn="l" rtl="0" eaLnBrk="0" fontAlgn="base" latinLnBrk="1" hangingPunct="0">
+      <a:lvl5pPr algn="l" rtl="0" eaLnBrk="0" fontAlgn="base" latinLnBrk="0" hangingPunct="0">
         <a:spcBef>
           <a:spcPct val="0"/>
         </a:spcBef>
@@ -3128,7 +3128,7 @@
           <a:ea typeface="맑은 고딕" pitchFamily="50" charset="-127"/>
         </a:defRPr>
       </a:lvl5pPr>
-      <a:lvl6pPr marL="457200" algn="ctr" rtl="0" fontAlgn="base" latinLnBrk="1">
+      <a:lvl6pPr marL="457200" algn="ctr" rtl="0" fontAlgn="base" latinLnBrk="0">
         <a:spcBef>
           <a:spcPct val="0"/>
         </a:spcBef>
@@ -3143,7 +3143,7 @@
           <a:ea typeface="맑은 고딕" pitchFamily="50" charset="-127"/>
         </a:defRPr>
       </a:lvl6pPr>
-      <a:lvl7pPr marL="914400" algn="ctr" rtl="0" fontAlgn="base" latinLnBrk="1">
+      <a:lvl7pPr marL="914400" algn="ctr" rtl="0" fontAlgn="base" latinLnBrk="0">
         <a:spcBef>
           <a:spcPct val="0"/>
         </a:spcBef>
@@ -3158,7 +3158,7 @@
           <a:ea typeface="맑은 고딕" pitchFamily="50" charset="-127"/>
         </a:defRPr>
       </a:lvl7pPr>
-      <a:lvl8pPr marL="1371600" algn="ctr" rtl="0" fontAlgn="base" latinLnBrk="1">
+      <a:lvl8pPr marL="1371600" algn="ctr" rtl="0" fontAlgn="base" latinLnBrk="0">
         <a:spcBef>
           <a:spcPct val="0"/>
         </a:spcBef>
@@ -3173,7 +3173,7 @@
           <a:ea typeface="맑은 고딕" pitchFamily="50" charset="-127"/>
         </a:defRPr>
       </a:lvl8pPr>
-      <a:lvl9pPr marL="1828800" algn="ctr" rtl="0" fontAlgn="base" latinLnBrk="1">
+      <a:lvl9pPr marL="1828800" algn="ctr" rtl="0" fontAlgn="base" latinLnBrk="0">
         <a:spcBef>
           <a:spcPct val="0"/>
         </a:spcBef>
@@ -3190,7 +3190,7 @@
       </a:lvl9pPr>
     </p:titleStyle>
     <p:bodyStyle>
-      <a:lvl1pPr marL="342900" indent="-342900" algn="l" rtl="0" eaLnBrk="0" fontAlgn="base" latinLnBrk="1" hangingPunct="0">
+      <a:lvl1pPr marL="342900" indent="-342900" algn="l" rtl="0" eaLnBrk="0" fontAlgn="base" latinLnBrk="0" hangingPunct="0">
         <a:spcBef>
           <a:spcPct val="20000"/>
         </a:spcBef>
@@ -3208,7 +3208,7 @@
           <a:cs typeface="+mn-cs"/>
         </a:defRPr>
       </a:lvl1pPr>
-      <a:lvl2pPr marL="742950" indent="-285750" algn="l" rtl="0" eaLnBrk="0" fontAlgn="base" latinLnBrk="1" hangingPunct="0">
+      <a:lvl2pPr marL="742950" indent="-285750" algn="l" rtl="0" eaLnBrk="0" fontAlgn="base" latinLnBrk="0" hangingPunct="0">
         <a:spcBef>
           <a:spcPct val="20000"/>
         </a:spcBef>
@@ -3226,7 +3226,7 @@
           <a:cs typeface="+mn-cs"/>
         </a:defRPr>
       </a:lvl2pPr>
-      <a:lvl3pPr marL="1143000" indent="-228600" algn="l" rtl="0" eaLnBrk="0" fontAlgn="base" latinLnBrk="1" hangingPunct="0">
+      <a:lvl3pPr marL="1143000" indent="-228600" algn="l" rtl="0" eaLnBrk="0" fontAlgn="base" latinLnBrk="0" hangingPunct="0">
         <a:spcBef>
           <a:spcPct val="20000"/>
         </a:spcBef>
@@ -3244,7 +3244,7 @@
           <a:cs typeface="+mn-cs"/>
         </a:defRPr>
       </a:lvl3pPr>
-      <a:lvl4pPr marL="1600200" indent="-228600" algn="l" rtl="0" eaLnBrk="0" fontAlgn="base" latinLnBrk="1" hangingPunct="0">
+      <a:lvl4pPr marL="1600200" indent="-228600" algn="l" rtl="0" eaLnBrk="0" fontAlgn="base" latinLnBrk="0" hangingPunct="0">
         <a:spcBef>
           <a:spcPct val="20000"/>
         </a:spcBef>
@@ -3262,7 +3262,7 @@
           <a:cs typeface="+mn-cs"/>
         </a:defRPr>
       </a:lvl4pPr>
-      <a:lvl5pPr marL="2057400" indent="-228600" algn="l" rtl="0" eaLnBrk="0" fontAlgn="base" latinLnBrk="1" hangingPunct="0">
+      <a:lvl5pPr marL="2057400" indent="-228600" algn="l" rtl="0" eaLnBrk="0" fontAlgn="base" latinLnBrk="0" hangingPunct="0">
         <a:spcBef>
           <a:spcPct val="20000"/>
         </a:spcBef>
@@ -3280,7 +3280,7 @@
           <a:cs typeface="+mn-cs"/>
         </a:defRPr>
       </a:lvl5pPr>
-      <a:lvl6pPr marL="2514600" indent="-228600" algn="l" defTabSz="914400" rtl="0" eaLnBrk="1" latinLnBrk="1" hangingPunct="1">
+      <a:lvl6pPr marL="2514600" indent="-228600" algn="l" defTabSz="914400" rtl="0" eaLnBrk="1" latinLnBrk="0" hangingPunct="1">
         <a:spcBef>
           <a:spcPct val="20000"/>
         </a:spcBef>
@@ -3295,7 +3295,7 @@
           <a:cs typeface="+mn-cs"/>
         </a:defRPr>
       </a:lvl6pPr>
-      <a:lvl7pPr marL="2971800" indent="-228600" algn="l" defTabSz="914400" rtl="0" eaLnBrk="1" latinLnBrk="1" hangingPunct="1">
+      <a:lvl7pPr marL="2971800" indent="-228600" algn="l" defTabSz="914400" rtl="0" eaLnBrk="1" latinLnBrk="0" hangingPunct="1">
         <a:spcBef>
           <a:spcPct val="20000"/>
         </a:spcBef>
@@ -3310,7 +3310,7 @@
           <a:cs typeface="+mn-cs"/>
         </a:defRPr>
       </a:lvl7pPr>
-      <a:lvl8pPr marL="3429000" indent="-228600" algn="l" defTabSz="914400" rtl="0" eaLnBrk="1" latinLnBrk="1" hangingPunct="1">
+      <a:lvl8pPr marL="3429000" indent="-228600" algn="l" defTabSz="914400" rtl="0" eaLnBrk="1" latinLnBrk="0" hangingPunct="1">
         <a:spcBef>
           <a:spcPct val="20000"/>
         </a:spcBef>
@@ -3325,7 +3325,7 @@
           <a:cs typeface="+mn-cs"/>
         </a:defRPr>
       </a:lvl8pPr>
-      <a:lvl9pPr marL="3886200" indent="-228600" algn="l" defTabSz="914400" rtl="0" eaLnBrk="1" latinLnBrk="1" hangingPunct="1">
+      <a:lvl9pPr marL="3886200" indent="-228600" algn="l" defTabSz="914400" rtl="0" eaLnBrk="1" latinLnBrk="0" hangingPunct="1">
         <a:spcBef>
           <a:spcPct val="20000"/>
         </a:spcBef>
@@ -3345,7 +3345,7 @@
       <a:defPPr>
         <a:defRPr lang="ko-KR"/>
       </a:defPPr>
-      <a:lvl1pPr marL="0" algn="l" defTabSz="914400" rtl="0" eaLnBrk="1" latinLnBrk="1" hangingPunct="1">
+      <a:lvl1pPr marL="0" algn="l" defTabSz="914400" rtl="0" eaLnBrk="1" latinLnBrk="0" hangingPunct="1">
         <a:defRPr sz="1800" kern="1200">
           <a:solidFill>
             <a:schemeClr val="tx1"/>
@@ -3355,7 +3355,7 @@
           <a:cs typeface="+mn-cs"/>
         </a:defRPr>
       </a:lvl1pPr>
-      <a:lvl2pPr marL="457200" algn="l" defTabSz="914400" rtl="0" eaLnBrk="1" latinLnBrk="1" hangingPunct="1">
+      <a:lvl2pPr marL="457200" algn="l" defTabSz="914400" rtl="0" eaLnBrk="1" latinLnBrk="0" hangingPunct="1">
         <a:defRPr sz="1800" kern="1200">
           <a:solidFill>
             <a:schemeClr val="tx1"/>
@@ -3365,7 +3365,7 @@
           <a:cs typeface="+mn-cs"/>
         </a:defRPr>
       </a:lvl2pPr>
-      <a:lvl3pPr marL="914400" algn="l" defTabSz="914400" rtl="0" eaLnBrk="1" latinLnBrk="1" hangingPunct="1">
+      <a:lvl3pPr marL="914400" algn="l" defTabSz="914400" rtl="0" eaLnBrk="1" latinLnBrk="0" hangingPunct="1">
         <a:defRPr sz="1800" kern="1200">
           <a:solidFill>
             <a:schemeClr val="tx1"/>
@@ -3375,7 +3375,7 @@
           <a:cs typeface="+mn-cs"/>
         </a:defRPr>
       </a:lvl3pPr>
-      <a:lvl4pPr marL="1371600" algn="l" defTabSz="914400" rtl="0" eaLnBrk="1" latinLnBrk="1" hangingPunct="1">
+      <a:lvl4pPr marL="1371600" algn="l" defTabSz="914400" rtl="0" eaLnBrk="1" latinLnBrk="0" hangingPunct="1">
         <a:defRPr sz="1800" kern="1200">
           <a:solidFill>
             <a:schemeClr val="tx1"/>
@@ -3385,7 +3385,7 @@
           <a:cs typeface="+mn-cs"/>
         </a:defRPr>
       </a:lvl4pPr>
-      <a:lvl5pPr marL="1828800" algn="l" defTabSz="914400" rtl="0" eaLnBrk="1" latinLnBrk="1" hangingPunct="1">
+      <a:lvl5pPr marL="1828800" algn="l" defTabSz="914400" rtl="0" eaLnBrk="1" latinLnBrk="0" hangingPunct="1">
         <a:defRPr sz="1800" kern="1200">
           <a:solidFill>
             <a:schemeClr val="tx1"/>
@@ -3395,7 +3395,7 @@
           <a:cs typeface="+mn-cs"/>
         </a:defRPr>
       </a:lvl5pPr>
-      <a:lvl6pPr marL="2286000" algn="l" defTabSz="914400" rtl="0" eaLnBrk="1" latinLnBrk="1" hangingPunct="1">
+      <a:lvl6pPr marL="2286000" algn="l" defTabSz="914400" rtl="0" eaLnBrk="1" latinLnBrk="0" hangingPunct="1">
         <a:defRPr sz="1800" kern="1200">
           <a:solidFill>
             <a:schemeClr val="tx1"/>
@@ -3405,7 +3405,7 @@
           <a:cs typeface="+mn-cs"/>
         </a:defRPr>
       </a:lvl6pPr>
-      <a:lvl7pPr marL="2743200" algn="l" defTabSz="914400" rtl="0" eaLnBrk="1" latinLnBrk="1" hangingPunct="1">
+      <a:lvl7pPr marL="2743200" algn="l" defTabSz="914400" rtl="0" eaLnBrk="1" latinLnBrk="0" hangingPunct="1">
         <a:defRPr sz="1800" kern="1200">
           <a:solidFill>
             <a:schemeClr val="tx1"/>
@@ -3415,7 +3415,7 @@
           <a:cs typeface="+mn-cs"/>
         </a:defRPr>
       </a:lvl7pPr>
-      <a:lvl8pPr marL="3200400" algn="l" defTabSz="914400" rtl="0" eaLnBrk="1" latinLnBrk="1" hangingPunct="1">
+      <a:lvl8pPr marL="3200400" algn="l" defTabSz="914400" rtl="0" eaLnBrk="1" latinLnBrk="0" hangingPunct="1">
         <a:defRPr sz="1800" kern="1200">
           <a:solidFill>
             <a:schemeClr val="tx1"/>
@@ -3425,7 +3425,7 @@
           <a:cs typeface="+mn-cs"/>
         </a:defRPr>
       </a:lvl8pPr>
-      <a:lvl9pPr marL="3657600" algn="l" defTabSz="914400" rtl="0" eaLnBrk="1" latinLnBrk="1" hangingPunct="1">
+      <a:lvl9pPr marL="3657600" algn="l" defTabSz="914400" rtl="0" eaLnBrk="1" latinLnBrk="0" hangingPunct="1">
         <a:defRPr sz="1800" kern="1200">
           <a:solidFill>
             <a:schemeClr val="tx1"/>
@@ -5722,7 +5722,7 @@
                 <a:latin typeface="맑은 고딕"/>
                 <a:ea typeface="맑은 고딕"/>
               </a:rPr>
-              <a:t>가 evidence가 되어 「07」의 빈틈을 보였다.</a:t>
+              <a:t>가 evidence가 되어 「07. 통합이 드러낸 빈틈」을 보였다.</a:t>
             </a:r>
           </a:p>
         </p:txBody>
@@ -6673,7 +6673,7 @@
                 <a:latin typeface="맑은 고딕"/>
                 <a:ea typeface="맑은 고딕"/>
               </a:rPr>
-              <a:t>George Fairbanks, 2010, www</a:t>
+              <a:t>[Fairbanks 2010, 재인용]</a:t>
             </a:r>
           </a:p>
         </p:txBody>
@@ -9418,7 +9418,7 @@
                 <a:latin typeface="맑은 고딕"/>
                 <a:ea typeface="맑은 고딕"/>
               </a:rPr>
-              <a:t>Craig Larman, 2004</a:t>
+              <a:t>[Larman 2004]</a:t>
             </a:r>
           </a:p>
         </p:txBody>
@@ -9729,7 +9729,7 @@
           </p:nvPr>
         </p:nvGraphicFramePr>
         <p:xfrm>
-          <a:off x="2055686" y="2801048"/>
+          <a:off x="2055686" y="2649162"/>
           <a:ext cx="5019040" cy="3873500"/>
         </p:xfrm>
         <a:graphic>
@@ -10804,7 +10804,7 @@
         <p:spPr>
           <a:xfrm>
             <a:off x="365760" y="960120"/>
-            <a:ext cx="8412480" cy="1739328"/>
+            <a:ext cx="8412480" cy="1587442"/>
           </a:xfrm>
           <a:prstGeom prst="rect">
             <a:avLst/>
@@ -10997,7 +10997,7 @@
                 <a:latin typeface="맑은 고딕"/>
                 <a:ea typeface="맑은 고딕"/>
               </a:rPr>
-              <a:t>Scott W. Ambler, 2002, www</a:t>
+              <a:t>[Ambler]</a:t>
             </a:r>
           </a:p>
         </p:txBody>
@@ -13999,7 +13999,7 @@
                 <a:latin typeface="맑은 고딕"/>
                 <a:ea typeface="맑은 고딕"/>
               </a:rPr>
-              <a:t>Craig Larman, 2004</a:t>
+              <a:t>[Larman 2004]</a:t>
             </a:r>
           </a:p>
           <a:p>
@@ -14095,7 +14095,7 @@
                 <a:latin typeface="맑은 고딕"/>
                 <a:ea typeface="맑은 고딕"/>
               </a:rPr>
-              <a:t>(「11」)</a:t>
+              <a:t>(「11. 통합 테스트」)</a:t>
             </a:r>
             <a:r>
               <a:rPr sz="1600" b="0">
@@ -15022,7 +15022,7 @@
                 <a:latin typeface="맑은 고딕"/>
                 <a:ea typeface="맑은 고딕"/>
               </a:rPr>
-              <a:t>(「15」)</a:t>
+              <a:t>(「15. 유지 비용」)</a:t>
             </a:r>
             <a:r>
               <a:rPr sz="1600" b="0">
@@ -15300,7 +15300,7 @@
                 <a:latin typeface="맑은 고딕"/>
                 <a:ea typeface="맑은 고딕"/>
               </a:rPr>
-              <a:t> 건너뛴다. 「02」의 인용처럼, 위험이 성공을 위협할 때 엉성한 설계는 변명할 수 없다.</a:t>
+              <a:t> 건너뛴다. 「02. 모델의 가치」의 인용처럼, 위험이 성공을 위협할 때 엉성한 설계는 변명할 수 없다.</a:t>
             </a:r>
           </a:p>
           <a:p>
@@ -15416,7 +15416,7 @@
                 <a:latin typeface="맑은 고딕"/>
                 <a:ea typeface="맑은 고딕"/>
               </a:rPr>
-              <a:t>(「13」)</a:t>
+              <a:t>(「13. 주문 사례의 위험과 모델」)</a:t>
             </a:r>
             <a:r>
               <a:rPr sz="1600" b="0">
@@ -15717,7 +15717,7 @@
                 <a:latin typeface="맑은 고딕"/>
                 <a:ea typeface="맑은 고딕"/>
               </a:rPr>
-              <a:t> 「07」의 빈틈을 출시 직전 통합에서 발견한다. 매핑·결정 기록·테이블 모두를 한꺼번에 다시 연다.</a:t>
+              <a:t> 「07. 통합이 드러낸 빈틈」의 빈틈을 출시 직전 통합에서 발견한다. 매핑·결정 기록·테이블 모두를 한꺼번에 다시 연다.</a:t>
             </a:r>
           </a:p>
           <a:p>
@@ -20713,6 +20713,27 @@
             </a:r>
           </a:p>
           <a:p>
+            <a:pPr marL="342900" indent="0">
+              <a:spcBef>
+                <a:spcPts val="600"/>
+              </a:spcBef>
+              <a:spcAft>
+                <a:spcPts val="600"/>
+              </a:spcAft>
+              <a:buNone/>
+            </a:pPr>
+            <a:r>
+              <a:rPr sz="1800" b="1">
+                <a:solidFill>
+                  <a:srgbClr val="000000"/>
+                </a:solidFill>
+                <a:latin typeface="맑은 고딕"/>
+                <a:ea typeface="맑은 고딕"/>
+              </a:rPr>
+              <a:t>통합 설계와 적정 모델링의 핵심</a:t>
+            </a:r>
+          </a:p>
+          <a:p>
             <a:pPr lvl="2" marL="723900" indent="-368300">
               <a:spcBef>
                 <a:spcPts val="600"/>
@@ -20725,6 +20746,16 @@
               <a:buChar char=""/>
             </a:pPr>
             <a:r>
+              <a:rPr sz="1800" b="1">
+                <a:solidFill>
+                  <a:srgbClr val="000000"/>
+                </a:solidFill>
+                <a:latin typeface="맑은 고딕"/>
+                <a:ea typeface="맑은 고딕"/>
+              </a:rPr>
+              <a:t>원칙</a:t>
+            </a:r>
+            <a:r>
               <a:rPr sz="1800" b="0">
                 <a:solidFill>
                   <a:srgbClr val="000000"/>
@@ -20732,30 +20763,7 @@
                 <a:latin typeface="맑은 고딕"/>
                 <a:ea typeface="맑은 고딕"/>
               </a:rPr>
-              <a:t>통합 설계와 적정 모델링의 핵심</a:t>
-            </a:r>
-          </a:p>
-          <a:p>
-            <a:pPr lvl="3" marL="1077913" indent="-354013">
-              <a:spcBef>
-                <a:spcPts val="600"/>
-              </a:spcBef>
-              <a:spcAft>
-                <a:spcPts val="600"/>
-              </a:spcAft>
-              <a:buSzPct val="90000"/>
-              <a:buFont typeface="Wingdings" pitchFamily="2" charset="2"/>
-              <a:buChar char=""/>
-            </a:pPr>
-            <a:r>
-              <a:rPr sz="1600" b="1">
-                <a:solidFill>
-                  <a:srgbClr val="000000"/>
-                </a:solidFill>
-                <a:latin typeface="맑은 고딕"/>
-                <a:ea typeface="맑은 고딕"/>
-              </a:rPr>
-              <a:t>원칙</a:t>
+              <a:t> —</a:t>
             </a:r>
             <a:r>
               <a:rPr sz="1600" b="0">
@@ -20765,232 +20773,7 @@
                 <a:latin typeface="맑은 고딕"/>
                 <a:ea typeface="맑은 고딕"/>
               </a:rPr>
-              <a:t> —</a:t>
-            </a:r>
-            <a:r>
-              <a:rPr sz="1400" b="0">
-                <a:solidFill>
-                  <a:srgbClr val="000000"/>
-                </a:solidFill>
-                <a:latin typeface="맑은 고딕"/>
-                <a:ea typeface="맑은 고딕"/>
-              </a:rPr>
               <a:t> 모델의 가치는 답한 질문과 줄인 위험이다. 판단이 나아지지 않으면 멈춘다</a:t>
-            </a:r>
-          </a:p>
-          <a:p>
-            <a:pPr lvl="3" marL="1077913" indent="-354013">
-              <a:spcBef>
-                <a:spcPts val="600"/>
-              </a:spcBef>
-              <a:spcAft>
-                <a:spcPts val="600"/>
-              </a:spcAft>
-              <a:buSzPct val="90000"/>
-              <a:buFont typeface="Wingdings" pitchFamily="2" charset="2"/>
-              <a:buChar char=""/>
-            </a:pPr>
-            <a:r>
-              <a:rPr sz="1600" b="1">
-                <a:solidFill>
-                  <a:srgbClr val="000000"/>
-                </a:solidFill>
-                <a:latin typeface="맑은 고딕"/>
-                <a:ea typeface="맑은 고딕"/>
-              </a:rPr>
-              <a:t>통합</a:t>
-            </a:r>
-            <a:r>
-              <a:rPr sz="1600" b="0">
-                <a:solidFill>
-                  <a:srgbClr val="000000"/>
-                </a:solidFill>
-                <a:latin typeface="맑은 고딕"/>
-                <a:ea typeface="맑은 고딕"/>
-              </a:rPr>
-              <a:t> —</a:t>
-            </a:r>
-            <a:r>
-              <a:rPr sz="1400" b="0">
-                <a:solidFill>
-                  <a:srgbClr val="000000"/>
-                </a:solidFill>
-                <a:latin typeface="맑은 고딕"/>
-                <a:ea typeface="맑은 고딕"/>
-              </a:rPr>
-              <a:t> 주문 O-1의 취소를 요구부터 저장까지 추적하고 실제로 조립한다</a:t>
-            </a:r>
-          </a:p>
-          <a:p>
-            <a:pPr lvl="3" marL="1077913" indent="-354013">
-              <a:spcBef>
-                <a:spcPts val="600"/>
-              </a:spcBef>
-              <a:spcAft>
-                <a:spcPts val="600"/>
-              </a:spcAft>
-              <a:buSzPct val="90000"/>
-              <a:buFont typeface="Wingdings" pitchFamily="2" charset="2"/>
-              <a:buChar char=""/>
-            </a:pPr>
-            <a:r>
-              <a:rPr sz="1600" b="1">
-                <a:solidFill>
-                  <a:srgbClr val="000000"/>
-                </a:solidFill>
-                <a:latin typeface="맑은 고딕"/>
-                <a:ea typeface="맑은 고딕"/>
-              </a:rPr>
-              <a:t>빈틈</a:t>
-            </a:r>
-            <a:r>
-              <a:rPr sz="1600" b="0">
-                <a:solidFill>
-                  <a:srgbClr val="000000"/>
-                </a:solidFill>
-                <a:latin typeface="맑은 고딕"/>
-                <a:ea typeface="맑은 고딕"/>
-              </a:rPr>
-              <a:t> —</a:t>
-            </a:r>
-            <a:r>
-              <a:rPr sz="1400" b="0">
-                <a:solidFill>
-                  <a:srgbClr val="000000"/>
-                </a:solidFill>
-                <a:latin typeface="맑은 고딕"/>
-                <a:ea typeface="맑은 고딕"/>
-              </a:rPr>
-              <a:t> 모델마다 맞아도 조립하면 깨질 수 있다. 결제·배송 연결과 고른 대행사를 저장해 보완했다</a:t>
-            </a:r>
-          </a:p>
-          <a:p>
-            <a:pPr lvl="3" marL="1077913" indent="-354013">
-              <a:spcBef>
-                <a:spcPts val="600"/>
-              </a:spcBef>
-              <a:spcAft>
-                <a:spcPts val="600"/>
-              </a:spcAft>
-              <a:buSzPct val="90000"/>
-              <a:buFont typeface="Wingdings" pitchFamily="2" charset="2"/>
-              <a:buChar char=""/>
-            </a:pPr>
-            <a:r>
-              <a:rPr sz="1600" b="1">
-                <a:solidFill>
-                  <a:srgbClr val="000000"/>
-                </a:solidFill>
-                <a:latin typeface="맑은 고딕"/>
-                <a:ea typeface="맑은 고딕"/>
-              </a:rPr>
-              <a:t>위험 주도</a:t>
-            </a:r>
-            <a:r>
-              <a:rPr sz="1600" b="0">
-                <a:solidFill>
-                  <a:srgbClr val="000000"/>
-                </a:solidFill>
-                <a:latin typeface="맑은 고딕"/>
-                <a:ea typeface="맑은 고딕"/>
-              </a:rPr>
-              <a:t> —</a:t>
-            </a:r>
-            <a:r>
-              <a:rPr sz="1400" b="0">
-                <a:solidFill>
-                  <a:srgbClr val="000000"/>
-                </a:solidFill>
-                <a:latin typeface="맑은 고딕"/>
-                <a:ea typeface="맑은 고딕"/>
-              </a:rPr>
-              <a:t> 위험을 찾고, 기법을 고르고, 줄었는지 평가한다</a:t>
-            </a:r>
-          </a:p>
-          <a:p>
-            <a:pPr lvl="3" marL="1077913" indent="-354013">
-              <a:spcBef>
-                <a:spcPts val="600"/>
-              </a:spcBef>
-              <a:spcAft>
-                <a:spcPts val="600"/>
-              </a:spcAft>
-              <a:buSzPct val="90000"/>
-              <a:buFont typeface="Wingdings" pitchFamily="2" charset="2"/>
-              <a:buChar char=""/>
-            </a:pPr>
-            <a:r>
-              <a:rPr sz="1600" b="1">
-                <a:solidFill>
-                  <a:srgbClr val="000000"/>
-                </a:solidFill>
-                <a:latin typeface="맑은 고딕"/>
-                <a:ea typeface="맑은 고딕"/>
-              </a:rPr>
-              <a:t>비용</a:t>
-            </a:r>
-            <a:r>
-              <a:rPr sz="1600" b="0">
-                <a:solidFill>
-                  <a:srgbClr val="000000"/>
-                </a:solidFill>
-                <a:latin typeface="맑은 고딕"/>
-                <a:ea typeface="맑은 고딕"/>
-              </a:rPr>
-              <a:t> —</a:t>
-            </a:r>
-            <a:r>
-              <a:rPr sz="1400" b="0">
-                <a:solidFill>
-                  <a:srgbClr val="000000"/>
-                </a:solidFill>
-                <a:latin typeface="맑은 고딕"/>
-                <a:ea typeface="맑은 고딕"/>
-              </a:rPr>
-              <a:t> 남긴 모델은 유지해야 한다. 코드에 없는 정보만 남긴다</a:t>
-            </a:r>
-          </a:p>
-          <a:p>
-            <a:pPr lvl="3" marL="1077913" indent="-354013">
-              <a:spcBef>
-                <a:spcPts val="600"/>
-              </a:spcBef>
-              <a:spcAft>
-                <a:spcPts val="600"/>
-              </a:spcAft>
-              <a:buSzPct val="90000"/>
-              <a:buFont typeface="Wingdings" pitchFamily="2" charset="2"/>
-              <a:buChar char=""/>
-            </a:pPr>
-            <a:r>
-              <a:rPr sz="1600" b="1">
-                <a:solidFill>
-                  <a:srgbClr val="000000"/>
-                </a:solidFill>
-                <a:latin typeface="맑은 고딕"/>
-                <a:ea typeface="맑은 고딕"/>
-              </a:rPr>
-              <a:t>잘못된 관행</a:t>
-            </a:r>
-            <a:r>
-              <a:rPr sz="1600" b="0">
-                <a:solidFill>
-                  <a:srgbClr val="000000"/>
-                </a:solidFill>
-                <a:latin typeface="맑은 고딕"/>
-                <a:ea typeface="맑은 고딕"/>
-              </a:rPr>
-              <a:t> —</a:t>
-            </a:r>
-            <a:r>
-              <a:rPr sz="1400" b="0">
-                <a:solidFill>
-                  <a:srgbClr val="000000"/>
-                </a:solidFill>
-                <a:latin typeface="맑은 고딕"/>
-                <a:ea typeface="맑은 고딕"/>
-              </a:rPr>
-              <a:t> 분석 마비, 문서를 위한 모델, 위험 앞의 생략, 조립 없는 완료</a:t>
             </a:r>
           </a:p>
           <a:p>
@@ -21006,6 +20789,16 @@
               <a:buChar char=""/>
             </a:pPr>
             <a:r>
+              <a:rPr sz="1800" b="1">
+                <a:solidFill>
+                  <a:srgbClr val="000000"/>
+                </a:solidFill>
+                <a:latin typeface="맑은 고딕"/>
+                <a:ea typeface="맑은 고딕"/>
+              </a:rPr>
+              <a:t>통합</a:t>
+            </a:r>
+            <a:r>
               <a:rPr sz="1800" b="0">
                 <a:solidFill>
                   <a:srgbClr val="000000"/>
@@ -21013,11 +20806,21 @@
                 <a:latin typeface="맑은 고딕"/>
                 <a:ea typeface="맑은 고딕"/>
               </a:rPr>
-              <a:t>다음 세션</a:t>
-            </a:r>
-          </a:p>
-          <a:p>
-            <a:pPr lvl="3" marL="1077913" indent="-354013">
+              <a:t> —</a:t>
+            </a:r>
+            <a:r>
+              <a:rPr sz="1600" b="0">
+                <a:solidFill>
+                  <a:srgbClr val="000000"/>
+                </a:solidFill>
+                <a:latin typeface="맑은 고딕"/>
+                <a:ea typeface="맑은 고딕"/>
+              </a:rPr>
+              <a:t> 주문 O-1의 취소를 요구부터 저장까지 추적하고 실제로 조립한다</a:t>
+            </a:r>
+          </a:p>
+          <a:p>
+            <a:pPr lvl="2" marL="723900" indent="-368300">
               <a:spcBef>
                 <a:spcPts val="600"/>
               </a:spcBef>
@@ -21026,9 +20829,29 @@
               </a:spcAft>
               <a:buSzPct val="90000"/>
               <a:buFont typeface="Wingdings" pitchFamily="2" charset="2"/>
-              <a:buChar char=""/>
+              <a:buChar char=""/>
             </a:pPr>
             <a:r>
+              <a:rPr sz="1800" b="1">
+                <a:solidFill>
+                  <a:srgbClr val="000000"/>
+                </a:solidFill>
+                <a:latin typeface="맑은 고딕"/>
+                <a:ea typeface="맑은 고딕"/>
+              </a:rPr>
+              <a:t>빈틈</a:t>
+            </a:r>
+            <a:r>
+              <a:rPr sz="1800" b="0">
+                <a:solidFill>
+                  <a:srgbClr val="000000"/>
+                </a:solidFill>
+                <a:latin typeface="맑은 고딕"/>
+                <a:ea typeface="맑은 고딕"/>
+              </a:rPr>
+              <a:t> —</a:t>
+            </a:r>
+            <a:r>
               <a:rPr sz="1600" b="0">
                 <a:solidFill>
                   <a:srgbClr val="000000"/>
@@ -21036,10 +20859,183 @@
                 <a:latin typeface="맑은 고딕"/>
                 <a:ea typeface="맑은 고딕"/>
               </a:rPr>
+              <a:t> 모델마다 맞아도 조립하면 깨질 수 있다. 결제·배송 연결과 고른 대행사를 저장해 보완했다</a:t>
+            </a:r>
+          </a:p>
+          <a:p>
+            <a:pPr lvl="2" marL="723900" indent="-368300">
+              <a:spcBef>
+                <a:spcPts val="600"/>
+              </a:spcBef>
+              <a:spcAft>
+                <a:spcPts val="600"/>
+              </a:spcAft>
+              <a:buSzPct val="90000"/>
+              <a:buFont typeface="Wingdings" pitchFamily="2" charset="2"/>
+              <a:buChar char=""/>
+            </a:pPr>
+            <a:r>
+              <a:rPr sz="1800" b="1">
+                <a:solidFill>
+                  <a:srgbClr val="000000"/>
+                </a:solidFill>
+                <a:latin typeface="맑은 고딕"/>
+                <a:ea typeface="맑은 고딕"/>
+              </a:rPr>
+              <a:t>위험 주도</a:t>
+            </a:r>
+            <a:r>
+              <a:rPr sz="1800" b="0">
+                <a:solidFill>
+                  <a:srgbClr val="000000"/>
+                </a:solidFill>
+                <a:latin typeface="맑은 고딕"/>
+                <a:ea typeface="맑은 고딕"/>
+              </a:rPr>
+              <a:t> —</a:t>
+            </a:r>
+            <a:r>
+              <a:rPr sz="1600" b="0">
+                <a:solidFill>
+                  <a:srgbClr val="000000"/>
+                </a:solidFill>
+                <a:latin typeface="맑은 고딕"/>
+                <a:ea typeface="맑은 고딕"/>
+              </a:rPr>
+              <a:t> 위험을 찾고, 기법을 고르고, 줄었는지 평가한다</a:t>
+            </a:r>
+          </a:p>
+          <a:p>
+            <a:pPr lvl="2" marL="723900" indent="-368300">
+              <a:spcBef>
+                <a:spcPts val="600"/>
+              </a:spcBef>
+              <a:spcAft>
+                <a:spcPts val="600"/>
+              </a:spcAft>
+              <a:buSzPct val="90000"/>
+              <a:buFont typeface="Wingdings" pitchFamily="2" charset="2"/>
+              <a:buChar char=""/>
+            </a:pPr>
+            <a:r>
+              <a:rPr sz="1800" b="1">
+                <a:solidFill>
+                  <a:srgbClr val="000000"/>
+                </a:solidFill>
+                <a:latin typeface="맑은 고딕"/>
+                <a:ea typeface="맑은 고딕"/>
+              </a:rPr>
+              <a:t>비용</a:t>
+            </a:r>
+            <a:r>
+              <a:rPr sz="1800" b="0">
+                <a:solidFill>
+                  <a:srgbClr val="000000"/>
+                </a:solidFill>
+                <a:latin typeface="맑은 고딕"/>
+                <a:ea typeface="맑은 고딕"/>
+              </a:rPr>
+              <a:t> —</a:t>
+            </a:r>
+            <a:r>
+              <a:rPr sz="1600" b="0">
+                <a:solidFill>
+                  <a:srgbClr val="000000"/>
+                </a:solidFill>
+                <a:latin typeface="맑은 고딕"/>
+                <a:ea typeface="맑은 고딕"/>
+              </a:rPr>
+              <a:t> 남긴 모델은 유지해야 한다. 코드에 없는 정보만 남긴다</a:t>
+            </a:r>
+          </a:p>
+          <a:p>
+            <a:pPr lvl="2" marL="723900" indent="-368300">
+              <a:spcBef>
+                <a:spcPts val="600"/>
+              </a:spcBef>
+              <a:spcAft>
+                <a:spcPts val="600"/>
+              </a:spcAft>
+              <a:buSzPct val="90000"/>
+              <a:buFont typeface="Wingdings" pitchFamily="2" charset="2"/>
+              <a:buChar char=""/>
+            </a:pPr>
+            <a:r>
+              <a:rPr sz="1800" b="1">
+                <a:solidFill>
+                  <a:srgbClr val="000000"/>
+                </a:solidFill>
+                <a:latin typeface="맑은 고딕"/>
+                <a:ea typeface="맑은 고딕"/>
+              </a:rPr>
+              <a:t>잘못된 관행</a:t>
+            </a:r>
+            <a:r>
+              <a:rPr sz="1800" b="0">
+                <a:solidFill>
+                  <a:srgbClr val="000000"/>
+                </a:solidFill>
+                <a:latin typeface="맑은 고딕"/>
+                <a:ea typeface="맑은 고딕"/>
+              </a:rPr>
+              <a:t> —</a:t>
+            </a:r>
+            <a:r>
+              <a:rPr sz="1600" b="0">
+                <a:solidFill>
+                  <a:srgbClr val="000000"/>
+                </a:solidFill>
+                <a:latin typeface="맑은 고딕"/>
+                <a:ea typeface="맑은 고딕"/>
+              </a:rPr>
+              <a:t> 분석 마비, 문서를 위한 모델, 위험 앞의 생략, 조립 없는 완료</a:t>
+            </a:r>
+          </a:p>
+          <a:p>
+            <a:pPr marL="342900" indent="0">
+              <a:spcBef>
+                <a:spcPts val="600"/>
+              </a:spcBef>
+              <a:spcAft>
+                <a:spcPts val="600"/>
+              </a:spcAft>
+              <a:buNone/>
+            </a:pPr>
+            <a:r>
+              <a:rPr sz="1800" b="1">
+                <a:solidFill>
+                  <a:srgbClr val="000000"/>
+                </a:solidFill>
+                <a:latin typeface="맑은 고딕"/>
+                <a:ea typeface="맑은 고딕"/>
+              </a:rPr>
+              <a:t>다음 세션</a:t>
+            </a:r>
+          </a:p>
+          <a:p>
+            <a:pPr lvl="2" marL="723900" indent="-368300">
+              <a:spcBef>
+                <a:spcPts val="600"/>
+              </a:spcBef>
+              <a:spcAft>
+                <a:spcPts val="600"/>
+              </a:spcAft>
+              <a:buSzPct val="90000"/>
+              <a:buFont typeface="Wingdings" pitchFamily="2" charset="2"/>
+              <a:buChar char=""/>
+            </a:pPr>
+            <a:r>
+              <a:rPr sz="1800" b="0">
+                <a:solidFill>
+                  <a:srgbClr val="000000"/>
+                </a:solidFill>
+                <a:latin typeface="맑은 고딕"/>
+                <a:ea typeface="맑은 고딕"/>
+              </a:rPr>
               <a:t>"</a:t>
             </a:r>
             <a:r>
-              <a:rPr sz="1600" b="1">
+              <a:rPr sz="1800" b="1">
                 <a:solidFill>
                   <a:srgbClr val="000000"/>
                 </a:solidFill>
@@ -21049,17 +21045,17 @@
               <a:t>12. 구현·검증·DevOps와 SW공학 피드백</a:t>
             </a:r>
             <a:r>
+              <a:rPr sz="1800" b="0">
+                <a:solidFill>
+                  <a:srgbClr val="000000"/>
+                </a:solidFill>
+                <a:latin typeface="맑은 고딕"/>
+                <a:ea typeface="맑은 고딕"/>
+              </a:rPr>
+              <a:t>" —</a:t>
+            </a:r>
+            <a:r>
               <a:rPr sz="1600" b="0">
-                <a:solidFill>
-                  <a:srgbClr val="000000"/>
-                </a:solidFill>
-                <a:latin typeface="맑은 고딕"/>
-                <a:ea typeface="맑은 고딕"/>
-              </a:rPr>
-              <a:t>" —</a:t>
-            </a:r>
-            <a:r>
-              <a:rPr sz="1400" b="0">
                 <a:solidFill>
                   <a:srgbClr val="000000"/>
                 </a:solidFill>
@@ -21427,7 +21423,7 @@
                 <a:latin typeface="맑은 고딕"/>
                 <a:ea typeface="맑은 고딕"/>
               </a:rPr>
-              <a:t>George Fairbanks, 2010, www</a:t>
+              <a:t>[Fairbanks 2010, 재인용]</a:t>
             </a:r>
           </a:p>
           <a:p>
@@ -21500,7 +21496,7 @@
                 <a:latin typeface="맑은 고딕"/>
                 <a:ea typeface="맑은 고딕"/>
               </a:rPr>
-              <a:t>(「03」~「11」)</a:t>
+              <a:t>(「03. 하나의 사례로 통합」~「11. 통합 테스트」)</a:t>
             </a:r>
             <a:r>
               <a:rPr sz="1600" b="0">
@@ -21583,7 +21579,7 @@
                 <a:latin typeface="맑은 고딕"/>
                 <a:ea typeface="맑은 고딕"/>
               </a:rPr>
-              <a:t>(「12」~「17」)</a:t>
+              <a:t>(「12. 위험 주도 모델링」~「17. 적정 수준의 점검」)</a:t>
             </a:r>
             <a:r>
               <a:rPr sz="1600" b="0">
@@ -21767,7 +21763,7 @@
           </p:nvPr>
         </p:nvGraphicFramePr>
         <p:xfrm>
-          <a:off x="1482916" y="2801048"/>
+          <a:off x="1482916" y="2649162"/>
           <a:ext cx="6164580" cy="3873500"/>
         </p:xfrm>
         <a:graphic>
@@ -23178,7 +23174,7 @@
         <p:spPr>
           <a:xfrm>
             <a:off x="365760" y="960120"/>
-            <a:ext cx="8412480" cy="1739328"/>
+            <a:ext cx="8412480" cy="1587442"/>
           </a:xfrm>
           <a:prstGeom prst="rect">
             <a:avLst/>
@@ -23331,7 +23327,7 @@
                 <a:latin typeface="맑은 고딕"/>
                 <a:ea typeface="맑은 고딕"/>
               </a:rPr>
-              <a:t>Craig Larman, 2004</a:t>
+              <a:t>[Larman 2004]</a:t>
             </a:r>
           </a:p>
         </p:txBody>
@@ -23415,7 +23411,7 @@
         </p:nvSpPr>
         <p:spPr>
           <a:xfrm>
-            <a:off x="365760" y="5206648"/>
+            <a:off x="365760" y="5054762"/>
             <a:ext cx="8412480" cy="781278"/>
           </a:xfrm>
           <a:prstGeom prst="rect">

--- a/courses/ooad/sessions/s11.pptx
+++ b/courses/ooad/sessions/s11.pptx
@@ -3874,6 +3874,48 @@
               <a:t>15. 유지 비용</a:t>
             </a:r>
           </a:p>
+          <a:p>
+            <a:pPr lvl="1" marL="355600" indent="0">
+              <a:spcBef>
+                <a:spcPts val="300"/>
+              </a:spcBef>
+              <a:spcAft>
+                <a:spcPts val="300"/>
+              </a:spcAft>
+              <a:buNone/>
+            </a:pPr>
+            <a:r>
+              <a:rPr sz="1600" b="0">
+                <a:solidFill>
+                  <a:srgbClr val="000000"/>
+                </a:solidFill>
+                <a:latin typeface="맑은 고딕"/>
+                <a:ea typeface="맑은 고딕"/>
+              </a:rPr>
+              <a:t>16. 추상화의 비용</a:t>
+            </a:r>
+          </a:p>
+          <a:p>
+            <a:pPr lvl="1" marL="355600" indent="0">
+              <a:spcBef>
+                <a:spcPts val="300"/>
+              </a:spcBef>
+              <a:spcAft>
+                <a:spcPts val="300"/>
+              </a:spcAft>
+              <a:buNone/>
+            </a:pPr>
+            <a:r>
+              <a:rPr sz="1600" b="0">
+                <a:solidFill>
+                  <a:srgbClr val="000000"/>
+                </a:solidFill>
+                <a:latin typeface="맑은 고딕"/>
+                <a:ea typeface="맑은 고딕"/>
+              </a:rPr>
+              <a:t>17. 적정 수준의 점검</a:t>
+            </a:r>
+          </a:p>
         </p:txBody>
       </p:sp>
       <p:sp>
@@ -3978,48 +4020,6 @@
             <a:normAutofit/>
           </a:bodyPr>
           <a:lstStyle/>
-          <a:p>
-            <a:pPr lvl="1" marL="355600" indent="0">
-              <a:spcBef>
-                <a:spcPts val="300"/>
-              </a:spcBef>
-              <a:spcAft>
-                <a:spcPts val="300"/>
-              </a:spcAft>
-              <a:buNone/>
-            </a:pPr>
-            <a:r>
-              <a:rPr sz="1600" b="0">
-                <a:solidFill>
-                  <a:srgbClr val="000000"/>
-                </a:solidFill>
-                <a:latin typeface="맑은 고딕"/>
-                <a:ea typeface="맑은 고딕"/>
-              </a:rPr>
-              <a:t>16. 추상화의 비용</a:t>
-            </a:r>
-          </a:p>
-          <a:p>
-            <a:pPr lvl="1" marL="355600" indent="0">
-              <a:spcBef>
-                <a:spcPts val="300"/>
-              </a:spcBef>
-              <a:spcAft>
-                <a:spcPts val="300"/>
-              </a:spcAft>
-              <a:buNone/>
-            </a:pPr>
-            <a:r>
-              <a:rPr sz="1600" b="0">
-                <a:solidFill>
-                  <a:srgbClr val="000000"/>
-                </a:solidFill>
-                <a:latin typeface="맑은 고딕"/>
-                <a:ea typeface="맑은 고딕"/>
-              </a:rPr>
-              <a:t>17. 적정 수준의 점검</a:t>
-            </a:r>
-          </a:p>
           <a:p>
             <a:pPr lvl="1" marL="355600" indent="0">
               <a:spcBef>
@@ -15987,7 +15987,7 @@
         <p:spPr>
           <a:xfrm>
             <a:off x="365760" y="960120"/>
-            <a:ext cx="8622792" cy="5522976"/>
+            <a:ext cx="8622792" cy="5352345"/>
           </a:xfrm>
         </p:spPr>
         <p:txBody>
@@ -20010,7 +20010,7 @@
         <p:spPr>
           <a:xfrm>
             <a:off x="233172" y="1414318"/>
-            <a:ext cx="4338828" cy="5068778"/>
+            <a:ext cx="4338828" cy="4898147"/>
           </a:xfrm>
         </p:spPr>
         <p:txBody>
@@ -20261,7 +20261,7 @@
         <p:spPr>
           <a:xfrm>
             <a:off x="4572000" y="1414318"/>
-            <a:ext cx="4439412" cy="5068778"/>
+            <a:ext cx="4439412" cy="4898147"/>
           </a:xfrm>
         </p:spPr>
         <p:txBody>

--- a/courses/ooad/sessions/s11.pptx
+++ b/courses/ooad/sessions/s11.pptx
@@ -1598,21 +1598,7 @@
             <a:pPr lvl="0"/>
             <a:r>
               <a:rPr lang="ko-KR" sz="1200"/>
-              <a:t>빈틈은 객체 설계의 계약을 쓰다 보이지만, 원인은 요구다 — 유스케이스 명세에 청구 후 취소의 흐름이 없다. 발견 위치와 원인 수준이 다르다.</a:t>
-            </a:r>
-          </a:p>
-          <a:p>
-            <a:pPr lvl="0"/>
-            <a:r>
-              <a:rPr lang="ko-KR" sz="1200"/>
-              <a:t>동적 모델은 정기배송 단위의 상태 기계만 그렸다(실습 4). 회차 상태는 실습 3에서 발견했지만 값과 전이는 정하지 않았다 — 위험이 작다고 본 판단이 청구 후 취소에서 다시 열린다.</a:t>
-            </a:r>
-          </a:p>
-          <a:p>
-            <a:pPr lvl="0"/>
-            <a:r>
-              <a:rPr lang="ko-KR" sz="1200"/>
-              <a:t>일시불(LUMP_SUM)이면 모든 회차가 청구된 상태라 빈틈이 더 크다.</a:t>
+              <a:t>이 세션의 빈틈은 실현에서 보였고 원인은 범위 결정이었다. 다음 세션은 이런 역추적을 코드·CI·운영의 evidence 전반으로 넓힌다.</a:t>
             </a:r>
           </a:p>
         </p:txBody>
@@ -1673,7 +1659,21 @@
             <a:pPr lvl="0"/>
             <a:r>
               <a:rPr lang="ko-KR" sz="1200"/>
-              <a:t>더 모델링할 곳은 하나다. 「17. 적정 수준의 점검」의 네 질문에 모두 "예"인 곳이 회차 상태 — 청구 후 취소 — 뿐이다. 앞서 그리지 않은 판단이 틀린 것은 아니다. 새 질문이 생겨 위험이 바뀌었다.</a:t>
+              <a:t>빈틈은 객체 설계의 계약을 쓰다 보이지만, 원인은 요구다 — 유스케이스 명세에 청구 후 취소의 흐름이 없다. 발견 위치와 원인 수준이 다르다.</a:t>
+            </a:r>
+          </a:p>
+          <a:p>
+            <a:pPr lvl="0"/>
+            <a:r>
+              <a:rPr lang="ko-KR" sz="1200"/>
+              <a:t>동적 모델은 정기배송 단위의 상태 기계만 그렸다(실습 4). 회차 상태는 실습 3에서 발견했지만 값과 전이는 정하지 않았다 — 위험이 작다고 본 판단이 청구 후 취소에서 다시 열린다.</a:t>
+            </a:r>
+          </a:p>
+          <a:p>
+            <a:pPr lvl="0"/>
+            <a:r>
+              <a:rPr lang="ko-KR" sz="1200"/>
+              <a:t>일시불(LUMP_SUM)이면 모든 회차가 청구된 상태라 빈틈이 더 크다.</a:t>
             </a:r>
           </a:p>
         </p:txBody>
@@ -1734,14 +1734,7 @@
             <a:pPr lvl="0"/>
             <a:r>
               <a:rPr lang="ko-KR" sz="1200"/>
-              <a:t>회차 상태 RoundStatus의 영문 값 — SCHEDULED, BILLED, DELIVERED, REFUND_PENDING, CANCELLED.</a:t>
-            </a:r>
-          </a:p>
-          <a:p>
-            <a:pPr lvl="0"/>
-            <a:r>
-              <a:rPr lang="ko-KR" sz="1200"/>
-              <a:t>요구를 다시 열면 뒤 모델도 따라 바뀐다. 이 순서 — 원인 수준에서 고치고 아래로 내려온다 — 가 다음 세션의 역추적이다.</a:t>
+              <a:t>더 모델링할 곳은 하나다. 「17. 적정 수준의 점검」의 네 질문에 모두 "예"인 곳이 회차 상태 — 청구 후 취소 — 뿐이다. 앞서 그리지 않은 판단이 틀린 것은 아니다. 새 질문이 생겨 위험이 바뀌었다.</a:t>
             </a:r>
           </a:p>
         </p:txBody>
@@ -1802,7 +1795,14 @@
             <a:pPr lvl="0"/>
             <a:r>
               <a:rPr lang="ko-KR" sz="1200"/>
-              <a:t>이 세션의 빈틈은 실현에서 보였고 원인은 범위 결정이었다. 다음 세션은 이런 역추적을 코드·CI·운영의 evidence 전반으로 넓힌다.</a:t>
+              <a:t>회차 상태 RoundStatus의 영문 값 — SCHEDULED, BILLED, DELIVERED, REFUND_PENDING, CANCELLED.</a:t>
+            </a:r>
+          </a:p>
+          <a:p>
+            <a:pPr lvl="0"/>
+            <a:r>
+              <a:rPr lang="ko-KR" sz="1200"/>
+              <a:t>요구를 다시 열면 뒤 모델도 따라 바뀐다. 이 순서 — 원인 수준에서 고치고 아래로 내려온다 — 가 다음 세션의 역추적이다.</a:t>
             </a:r>
           </a:p>
         </p:txBody>
@@ -4193,100 +4193,7 @@
                 <a:latin typeface="맑은 고딕"/>
                 <a:ea typeface="맑은 고딕"/>
               </a:rPr>
-              <a:t>23. 통합 추적표 </a:t>
-            </a:r>
-            <a:r>
-              <a:rPr sz="1200" b="0">
-                <a:solidFill>
-                  <a:srgbClr val="000000"/>
-                </a:solidFill>
-                <a:latin typeface="맑은 고딕"/>
-                <a:ea typeface="맑은 고딕"/>
-              </a:rPr>
-              <a:t>(안)</a:t>
-            </a:r>
-          </a:p>
-          <a:p>
-            <a:pPr lvl="1" marL="355600" indent="0">
-              <a:spcBef>
-                <a:spcPts val="300"/>
-              </a:spcBef>
-              <a:spcAft>
-                <a:spcPts val="300"/>
-              </a:spcAft>
-              <a:buNone/>
-            </a:pPr>
-            <a:r>
-              <a:rPr sz="1600" b="0">
-                <a:solidFill>
-                  <a:srgbClr val="000000"/>
-                </a:solidFill>
-                <a:latin typeface="맑은 고딕"/>
-                <a:ea typeface="맑은 고딕"/>
-              </a:rPr>
-              <a:t>24. 적정 모델링 판단 </a:t>
-            </a:r>
-            <a:r>
-              <a:rPr sz="1200" b="0">
-                <a:solidFill>
-                  <a:srgbClr val="000000"/>
-                </a:solidFill>
-                <a:latin typeface="맑은 고딕"/>
-                <a:ea typeface="맑은 고딕"/>
-              </a:rPr>
-              <a:t>(안)</a:t>
-            </a:r>
-          </a:p>
-          <a:p>
-            <a:pPr lvl="1" marL="355600" indent="0">
-              <a:spcBef>
-                <a:spcPts val="300"/>
-              </a:spcBef>
-              <a:spcAft>
-                <a:spcPts val="300"/>
-              </a:spcAft>
-              <a:buNone/>
-            </a:pPr>
-            <a:r>
-              <a:rPr sz="1600" b="0">
-                <a:solidFill>
-                  <a:srgbClr val="000000"/>
-                </a:solidFill>
-                <a:latin typeface="맑은 고딕"/>
-                <a:ea typeface="맑은 고딕"/>
-              </a:rPr>
-              <a:t>25. 통합 보완 </a:t>
-            </a:r>
-            <a:r>
-              <a:rPr sz="1200" b="0">
-                <a:solidFill>
-                  <a:srgbClr val="000000"/>
-                </a:solidFill>
-                <a:latin typeface="맑은 고딕"/>
-                <a:ea typeface="맑은 고딕"/>
-              </a:rPr>
-              <a:t>(안)</a:t>
-            </a:r>
-          </a:p>
-          <a:p>
-            <a:pPr lvl="1" marL="355600" indent="0">
-              <a:spcBef>
-                <a:spcPts val="300"/>
-              </a:spcBef>
-              <a:spcAft>
-                <a:spcPts val="300"/>
-              </a:spcAft>
-              <a:buNone/>
-            </a:pPr>
-            <a:r>
-              <a:rPr sz="1600" b="0">
-                <a:solidFill>
-                  <a:srgbClr val="000000"/>
-                </a:solidFill>
-                <a:latin typeface="맑은 고딕"/>
-                <a:ea typeface="맑은 고딕"/>
-              </a:rPr>
-              <a:t>26. 요약</a:t>
+              <a:t>23. 요약</a:t>
             </a:r>
           </a:p>
         </p:txBody>
@@ -12829,16 +12736,16 @@
           </p:nvPr>
         </p:nvGraphicFramePr>
         <p:xfrm>
-          <a:off x="2081086" y="1842998"/>
-          <a:ext cx="4968240" cy="3873500"/>
+          <a:off x="1997266" y="1842998"/>
+          <a:ext cx="5135880" cy="3873500"/>
         </p:xfrm>
         <a:graphic>
           <a:graphicData uri="http://schemas.openxmlformats.org/drawingml/2006/table">
             <a:tbl>
               <a:tblPr/>
               <a:tblGrid>
-                <a:gridCol w="1590040"/>
-                <a:gridCol w="3378200"/>
+                <a:gridCol w="1673860"/>
+                <a:gridCol w="3462020"/>
               </a:tblGrid>
               <a:tr h="288000">
                 <a:tc>
@@ -12993,7 +12900,7 @@
                           <a:ea typeface="맑은 고딕" panose="020B0503020000020004" pitchFamily="34" charset="-127"/>
                           <a:cs typeface="맑은 고딕"/>
                         </a:rPr>
-                        <a:t>답할 질문이 있는가</a:t>
+                        <a:t>답할 질문이 있는가?</a:t>
                       </a:r>
                     </a:p>
                   </a:txBody>
@@ -13047,7 +12954,7 @@
                           <a:ea typeface="맑은 고딕" panose="020B0503020000020004" pitchFamily="34" charset="-127"/>
                           <a:cs typeface="맑은 고딕"/>
                         </a:rPr>
-                        <a:t>당일 배송 주문은 누구에게 중단을 요청하는가</a:t>
+                        <a:t>당일 배송 주문은 누구에게 중단을 요청하는가?</a:t>
                       </a:r>
                     </a:p>
                   </a:txBody>
@@ -13105,7 +13012,7 @@
                           <a:ea typeface="맑은 고딕" panose="020B0503020000020004" pitchFamily="34" charset="-127"/>
                           <a:cs typeface="맑은 고딕"/>
                         </a:rPr>
-                        <a:t>위험이 있는가</a:t>
+                        <a:t>위험이 있는가?</a:t>
                       </a:r>
                     </a:p>
                   </a:txBody>
@@ -13217,7 +13124,7 @@
                           <a:ea typeface="맑은 고딕" panose="020B0503020000020004" pitchFamily="34" charset="-127"/>
                           <a:cs typeface="맑은 고딕"/>
                         </a:rPr>
-                        <a:t>판단이 바뀌는가</a:t>
+                        <a:t>판단이 바뀌는가?</a:t>
                       </a:r>
                     </a:p>
                   </a:txBody>
@@ -13329,7 +13236,7 @@
                           <a:ea typeface="맑은 고딕" panose="020B0503020000020004" pitchFamily="34" charset="-127"/>
                           <a:cs typeface="맑은 고딕"/>
                         </a:rPr>
-                        <a:t>유지할 수 있는가</a:t>
+                        <a:t>유지할 수 있는가?</a:t>
                       </a:r>
                     </a:p>
                   </a:txBody>
@@ -16150,7 +16057,7 @@
               <a:t>산출물 전체</a:t>
             </a:r>
             <a:r>
-              <a:rPr sz="1000" b="0">
+              <a:rPr sz="1200" b="0">
                 <a:solidFill>
                   <a:srgbClr val="000000"/>
                 </a:solidFill>
@@ -16204,7 +16111,7 @@
               <a:t>① "정기배송 S-1</a:t>
             </a:r>
             <a:r>
-              <a:rPr sz="1000" b="0">
+              <a:rPr sz="1200" b="0">
                 <a:solidFill>
                   <a:srgbClr val="000000"/>
                 </a:solidFill>
@@ -16234,7 +16141,7 @@
               <a:t>추적표</a:t>
             </a:r>
             <a:r>
-              <a:rPr sz="1000" b="0">
+              <a:rPr sz="1200" b="0">
                 <a:solidFill>
                   <a:srgbClr val="000000"/>
                 </a:solidFill>
@@ -16399,7 +16306,7 @@
               <a:t> —</a:t>
             </a:r>
             <a:r>
-              <a:rPr sz="1050" b="0">
+              <a:rPr sz="1400" b="0">
                 <a:solidFill>
                   <a:srgbClr val="000000"/>
                 </a:solidFill>
@@ -16409,7 +16316,7 @@
               <a:t> 요구의 흐름에서 매핑까지 같은 이름</a:t>
             </a:r>
             <a:r>
-              <a:rPr sz="850" b="0">
+              <a:rPr sz="1200" b="0">
                 <a:solidFill>
                   <a:srgbClr val="000000"/>
                 </a:solidFill>
@@ -16419,7 +16326,7 @@
               <a:t>(용어집)</a:t>
             </a:r>
             <a:r>
-              <a:rPr sz="1050" b="0">
+              <a:rPr sz="1400" b="0">
                 <a:solidFill>
                   <a:srgbClr val="000000"/>
                 </a:solidFill>
@@ -16470,7 +16377,7 @@
               <a:t> —</a:t>
             </a:r>
             <a:r>
-              <a:rPr sz="1050" b="0">
+              <a:rPr sz="1400" b="0">
                 <a:solidFill>
                   <a:srgbClr val="000000"/>
                 </a:solidFill>
@@ -16521,7 +16428,7 @@
               <a:t> —</a:t>
             </a:r>
             <a:r>
-              <a:rPr sz="1050" b="0">
+              <a:rPr sz="1400" b="0">
                 <a:solidFill>
                   <a:srgbClr val="000000"/>
                 </a:solidFill>
@@ -16531,7 +16438,7 @@
               <a:t> 모델마다 답이 맞았다는 확인 방법</a:t>
             </a:r>
             <a:r>
-              <a:rPr sz="850" b="0">
+              <a:rPr sz="1200" b="0">
                 <a:solidFill>
                   <a:srgbClr val="000000"/>
                 </a:solidFill>
@@ -16541,7 +16448,7 @@
               <a:t>(검토·테스트)</a:t>
             </a:r>
             <a:r>
-              <a:rPr sz="1050" b="0">
+              <a:rPr sz="1400" b="0">
                 <a:solidFill>
                   <a:srgbClr val="000000"/>
                 </a:solidFill>
@@ -16592,7 +16499,7 @@
               <a:t> —</a:t>
             </a:r>
             <a:r>
-              <a:rPr sz="1050" b="0">
+              <a:rPr sz="1400" b="0">
                 <a:solidFill>
                   <a:srgbClr val="000000"/>
                 </a:solidFill>
@@ -16643,7 +16550,7 @@
               <a:t> —</a:t>
             </a:r>
             <a:r>
-              <a:rPr sz="1050" b="0">
+              <a:rPr sz="1400" b="0">
                 <a:solidFill>
                   <a:srgbClr val="000000"/>
                 </a:solidFill>
@@ -16686,7 +16593,7 @@
               <a:t> —</a:t>
             </a:r>
             <a:r>
-              <a:rPr sz="1050" b="0">
+              <a:rPr sz="1600" b="0">
                 <a:solidFill>
                   <a:srgbClr val="000000"/>
                 </a:solidFill>
@@ -16712,6 +16619,607 @@
 </file>
 
 <file path=ppt/slides/slide24.xml><?xml version="1.0" encoding="utf-8"?>
+<p:sld xmlns:a="http://schemas.openxmlformats.org/drawingml/2006/main" xmlns:r="http://schemas.openxmlformats.org/officeDocument/2006/relationships" xmlns:p="http://schemas.openxmlformats.org/presentationml/2006/main">
+  <p:cSld>
+    <p:spTree>
+      <p:nvGrpSpPr>
+        <p:cNvPr id="1" name="">
+          <a:extLst>
+            <a:ext uri="{FF2B5EF4-FFF2-40B4-BE49-F238E27FC236}">
+              <a16:creationId xmlns:a16="http://schemas.microsoft.com/office/drawing/2014/main" id="{8E4F1F13-426B-086B-7D8C-9A58A0F879DB}"/>
+            </a:ext>
+          </a:extLst>
+        </p:cNvPr>
+        <p:cNvGrpSpPr/>
+        <p:nvPr/>
+      </p:nvGrpSpPr>
+      <p:grpSpPr>
+        <a:xfrm>
+          <a:off x="0" y="0"/>
+          <a:ext cx="0" cy="0"/>
+          <a:chOff x="0" y="0"/>
+          <a:chExt cx="0" cy="0"/>
+        </a:xfrm>
+      </p:grpSpPr>
+      <p:sp>
+        <p:nvSpPr>
+          <p:cNvPr id="2" name="제목 1">
+            <a:extLst>
+              <a:ext uri="{FF2B5EF4-FFF2-40B4-BE49-F238E27FC236}">
+                <a16:creationId xmlns:a16="http://schemas.microsoft.com/office/drawing/2014/main" id="{AA26A92D-924E-0575-9551-F8FD7BFD3FAD}"/>
+              </a:ext>
+            </a:extLst>
+          </p:cNvPr>
+          <p:cNvSpPr>
+            <a:spLocks noGrp="1"/>
+          </p:cNvSpPr>
+          <p:nvPr>
+            <p:ph type="title"/>
+          </p:nvPr>
+        </p:nvSpPr>
+        <p:spPr/>
+        <p:txBody>
+          <a:bodyPr/>
+          <a:lstStyle/>
+          <a:p>
+            <a:r>
+              <a:rPr sz="2400" b="1">
+                <a:solidFill>
+                  <a:srgbClr val="000000"/>
+                </a:solidFill>
+                <a:latin typeface="맑은 고딕"/>
+                <a:ea typeface="맑은 고딕"/>
+              </a:rPr>
+              <a:t>23. 요약</a:t>
+            </a:r>
+          </a:p>
+        </p:txBody>
+      </p:sp>
+      <p:sp>
+        <p:nvSpPr>
+          <p:cNvPr id="3" name="슬라이드 번호 개체 틀 2">
+            <a:extLst>
+              <a:ext uri="{FF2B5EF4-FFF2-40B4-BE49-F238E27FC236}">
+                <a16:creationId xmlns:a16="http://schemas.microsoft.com/office/drawing/2014/main" id="{12CF30EE-4DFD-8063-56B8-B8689E76DFCA}"/>
+              </a:ext>
+            </a:extLst>
+          </p:cNvPr>
+          <p:cNvSpPr>
+            <a:spLocks noGrp="1"/>
+          </p:cNvSpPr>
+          <p:nvPr>
+            <p:ph type="sldNum" sz="quarter" idx="10"/>
+          </p:nvPr>
+        </p:nvSpPr>
+        <p:spPr/>
+        <p:txBody>
+          <a:bodyPr/>
+          <a:lstStyle/>
+          <a:p>
+            <a:pPr>
+              <a:defRPr/>
+            </a:pPr>
+            <a:r>
+              <a:rPr lang="en-US" altLang="ko-KR">
+                <a:solidFill>
+                  <a:prstClr val="black"/>
+                </a:solidFill>
+              </a:rPr>
+              <a:t>- 24 -</a:t>
+            </a:r>
+          </a:p>
+        </p:txBody>
+      </p:sp>
+      <p:sp>
+        <p:nvSpPr>
+          <p:cNvPr id="5" name="텍스트 개체 틀 4">
+            <a:extLst>
+              <a:ext uri="{FF2B5EF4-FFF2-40B4-BE49-F238E27FC236}">
+                <a16:creationId xmlns:a16="http://schemas.microsoft.com/office/drawing/2014/main" id="{D66274C8-E16F-5AEB-614B-D8D32DA3E8C6}"/>
+              </a:ext>
+            </a:extLst>
+          </p:cNvPr>
+          <p:cNvSpPr>
+            <a:spLocks noGrp="1"/>
+          </p:cNvSpPr>
+          <p:nvPr>
+            <p:ph type="body" sz="quarter" idx="11"/>
+          </p:nvPr>
+        </p:nvSpPr>
+        <p:spPr/>
+        <p:txBody>
+          <a:bodyPr/>
+          <a:lstStyle/>
+          <a:p>
+            <a:r>
+              <a:rPr kumimoji="1" lang="en-US" altLang="ko-KR" sz="1400" dirty="0" err="1"/>
+              <a:t>11. 통합 설계와 적정 모델링</a:t>
+            </a:r>
+          </a:p>
+        </p:txBody>
+      </p:sp>
+      <p:sp>
+        <p:nvSpPr>
+          <p:cNvPr id="6" name="텍스트 개체 틀 5">
+            <a:extLst>
+              <a:ext uri="{FF2B5EF4-FFF2-40B4-BE49-F238E27FC236}">
+                <a16:creationId xmlns:a16="http://schemas.microsoft.com/office/drawing/2014/main" id="{A24E58E1-194B-A320-AEEE-24D08685BB67}"/>
+              </a:ext>
+            </a:extLst>
+          </p:cNvPr>
+          <p:cNvSpPr>
+            <a:spLocks noGrp="1"/>
+          </p:cNvSpPr>
+          <p:nvPr>
+            <p:ph type="body" sz="quarter" idx="12"/>
+          </p:nvPr>
+        </p:nvSpPr>
+        <p:spPr/>
+        <p:txBody>
+          <a:bodyPr/>
+          <a:lstStyle/>
+          <a:p>
+            <a:endParaRPr kumimoji="1" lang="ko-KR" altLang="en-US" dirty="0"/>
+          </a:p>
+        </p:txBody>
+      </p:sp>
+      <p:sp>
+        <p:nvSpPr>
+          <p:cNvPr id="7" name="텍스트 개체 틀 6">
+            <a:extLst>
+              <a:ext uri="{FF2B5EF4-FFF2-40B4-BE49-F238E27FC236}">
+                <a16:creationId xmlns:a16="http://schemas.microsoft.com/office/drawing/2014/main" id="{A219F420-613B-6234-45F6-0955A9A4505F}"/>
+              </a:ext>
+            </a:extLst>
+          </p:cNvPr>
+          <p:cNvSpPr>
+            <a:spLocks noGrp="1"/>
+          </p:cNvSpPr>
+          <p:nvPr>
+            <p:ph type="body" sz="quarter" idx="13"/>
+          </p:nvPr>
+        </p:nvSpPr>
+        <p:spPr/>
+        <p:txBody>
+          <a:bodyPr/>
+          <a:lstStyle/>
+          <a:p>
+            <a:endParaRPr kumimoji="1" lang="en-US" altLang="ko-KR" dirty="0"/>
+          </a:p>
+        </p:txBody>
+      </p:sp>
+      <p:sp>
+        <p:nvSpPr>
+          <p:cNvPr id="8" name="내용 개체 틀 7">
+            <a:extLst>
+              <a:ext uri="{FF2B5EF4-FFF2-40B4-BE49-F238E27FC236}">
+                <a16:creationId xmlns:a16="http://schemas.microsoft.com/office/drawing/2014/main" id="{BEBA2C4A-B0BF-F2E4-EA6E-614C99CBA184}"/>
+              </a:ext>
+            </a:extLst>
+          </p:cNvPr>
+          <p:cNvSpPr>
+            <a:spLocks noGrp="1"/>
+          </p:cNvSpPr>
+          <p:nvPr>
+            <p:ph idx="1"/>
+          </p:nvPr>
+        </p:nvSpPr>
+        <p:spPr/>
+        <p:txBody>
+          <a:bodyPr>
+            <a:normAutofit/>
+          </a:bodyPr>
+          <a:lstStyle/>
+          <a:p>
+            <a:pPr marL="0" indent="0">
+              <a:spcBef>
+                <a:spcPts val="600"/>
+              </a:spcBef>
+              <a:spcAft>
+                <a:spcPts val="600"/>
+              </a:spcAft>
+              <a:buNone/>
+            </a:pPr>
+            <a:r>
+              <a:rPr sz="1800" b="0">
+                <a:solidFill>
+                  <a:srgbClr val="000000"/>
+                </a:solidFill>
+                <a:latin typeface="맑은 고딕"/>
+                <a:ea typeface="맑은 고딕"/>
+              </a:rPr>
+              <a:t>이 세션은 모델들을 </a:t>
+            </a:r>
+            <a:r>
+              <a:rPr sz="1800" b="1">
+                <a:solidFill>
+                  <a:srgbClr val="000000"/>
+                </a:solidFill>
+                <a:latin typeface="맑은 고딕"/>
+                <a:ea typeface="맑은 고딕"/>
+              </a:rPr>
+              <a:t>하나의 사례로 통합</a:t>
+            </a:r>
+            <a:r>
+              <a:rPr sz="1800" b="0">
+                <a:solidFill>
+                  <a:srgbClr val="000000"/>
+                </a:solidFill>
+                <a:latin typeface="맑은 고딕"/>
+                <a:ea typeface="맑은 고딕"/>
+              </a:rPr>
+              <a:t>하고, 추가 모델링의 가치와 비용을 판단했다.</a:t>
+            </a:r>
+          </a:p>
+          <a:p>
+            <a:pPr marL="342900" indent="0">
+              <a:spcBef>
+                <a:spcPts val="600"/>
+              </a:spcBef>
+              <a:spcAft>
+                <a:spcPts val="600"/>
+              </a:spcAft>
+              <a:buNone/>
+            </a:pPr>
+            <a:r>
+              <a:rPr sz="1800" b="1">
+                <a:solidFill>
+                  <a:srgbClr val="000000"/>
+                </a:solidFill>
+                <a:latin typeface="맑은 고딕"/>
+                <a:ea typeface="맑은 고딕"/>
+              </a:rPr>
+              <a:t>통합 설계와 적정 모델링의 핵심</a:t>
+            </a:r>
+          </a:p>
+          <a:p>
+            <a:pPr lvl="2" marL="723900" indent="-368300">
+              <a:spcBef>
+                <a:spcPts val="600"/>
+              </a:spcBef>
+              <a:spcAft>
+                <a:spcPts val="600"/>
+              </a:spcAft>
+              <a:buSzPct val="90000"/>
+              <a:buFont typeface="Wingdings" pitchFamily="2" charset="2"/>
+              <a:buChar char=""/>
+            </a:pPr>
+            <a:r>
+              <a:rPr sz="1800" b="1">
+                <a:solidFill>
+                  <a:srgbClr val="000000"/>
+                </a:solidFill>
+                <a:latin typeface="맑은 고딕"/>
+                <a:ea typeface="맑은 고딕"/>
+              </a:rPr>
+              <a:t>원칙</a:t>
+            </a:r>
+            <a:r>
+              <a:rPr sz="1800" b="0">
+                <a:solidFill>
+                  <a:srgbClr val="000000"/>
+                </a:solidFill>
+                <a:latin typeface="맑은 고딕"/>
+                <a:ea typeface="맑은 고딕"/>
+              </a:rPr>
+              <a:t> —</a:t>
+            </a:r>
+            <a:r>
+              <a:rPr sz="1600" b="0">
+                <a:solidFill>
+                  <a:srgbClr val="000000"/>
+                </a:solidFill>
+                <a:latin typeface="맑은 고딕"/>
+                <a:ea typeface="맑은 고딕"/>
+              </a:rPr>
+              <a:t> 모델의 가치는 답한 질문과 줄인 위험이다. 판단이 나아지지 않으면 멈춘다</a:t>
+            </a:r>
+          </a:p>
+          <a:p>
+            <a:pPr lvl="2" marL="723900" indent="-368300">
+              <a:spcBef>
+                <a:spcPts val="600"/>
+              </a:spcBef>
+              <a:spcAft>
+                <a:spcPts val="600"/>
+              </a:spcAft>
+              <a:buSzPct val="90000"/>
+              <a:buFont typeface="Wingdings" pitchFamily="2" charset="2"/>
+              <a:buChar char=""/>
+            </a:pPr>
+            <a:r>
+              <a:rPr sz="1800" b="1">
+                <a:solidFill>
+                  <a:srgbClr val="000000"/>
+                </a:solidFill>
+                <a:latin typeface="맑은 고딕"/>
+                <a:ea typeface="맑은 고딕"/>
+              </a:rPr>
+              <a:t>통합</a:t>
+            </a:r>
+            <a:r>
+              <a:rPr sz="1800" b="0">
+                <a:solidFill>
+                  <a:srgbClr val="000000"/>
+                </a:solidFill>
+                <a:latin typeface="맑은 고딕"/>
+                <a:ea typeface="맑은 고딕"/>
+              </a:rPr>
+              <a:t> —</a:t>
+            </a:r>
+            <a:r>
+              <a:rPr sz="1600" b="0">
+                <a:solidFill>
+                  <a:srgbClr val="000000"/>
+                </a:solidFill>
+                <a:latin typeface="맑은 고딕"/>
+                <a:ea typeface="맑은 고딕"/>
+              </a:rPr>
+              <a:t> 주문 O-1의 취소를 요구부터 저장까지 추적하고 실제로 조립한다</a:t>
+            </a:r>
+          </a:p>
+          <a:p>
+            <a:pPr lvl="2" marL="723900" indent="-368300">
+              <a:spcBef>
+                <a:spcPts val="600"/>
+              </a:spcBef>
+              <a:spcAft>
+                <a:spcPts val="600"/>
+              </a:spcAft>
+              <a:buSzPct val="90000"/>
+              <a:buFont typeface="Wingdings" pitchFamily="2" charset="2"/>
+              <a:buChar char=""/>
+            </a:pPr>
+            <a:r>
+              <a:rPr sz="1800" b="1">
+                <a:solidFill>
+                  <a:srgbClr val="000000"/>
+                </a:solidFill>
+                <a:latin typeface="맑은 고딕"/>
+                <a:ea typeface="맑은 고딕"/>
+              </a:rPr>
+              <a:t>빈틈</a:t>
+            </a:r>
+            <a:r>
+              <a:rPr sz="1800" b="0">
+                <a:solidFill>
+                  <a:srgbClr val="000000"/>
+                </a:solidFill>
+                <a:latin typeface="맑은 고딕"/>
+                <a:ea typeface="맑은 고딕"/>
+              </a:rPr>
+              <a:t> —</a:t>
+            </a:r>
+            <a:r>
+              <a:rPr sz="1600" b="0">
+                <a:solidFill>
+                  <a:srgbClr val="000000"/>
+                </a:solidFill>
+                <a:latin typeface="맑은 고딕"/>
+                <a:ea typeface="맑은 고딕"/>
+              </a:rPr>
+              <a:t> 모델마다 맞아도 조립하면 깨질 수 있다. 결제·배송 연결과 고른 대행사를 저장해 보완했다</a:t>
+            </a:r>
+          </a:p>
+          <a:p>
+            <a:pPr lvl="2" marL="723900" indent="-368300">
+              <a:spcBef>
+                <a:spcPts val="600"/>
+              </a:spcBef>
+              <a:spcAft>
+                <a:spcPts val="600"/>
+              </a:spcAft>
+              <a:buSzPct val="90000"/>
+              <a:buFont typeface="Wingdings" pitchFamily="2" charset="2"/>
+              <a:buChar char=""/>
+            </a:pPr>
+            <a:r>
+              <a:rPr sz="1800" b="1">
+                <a:solidFill>
+                  <a:srgbClr val="000000"/>
+                </a:solidFill>
+                <a:latin typeface="맑은 고딕"/>
+                <a:ea typeface="맑은 고딕"/>
+              </a:rPr>
+              <a:t>위험 주도</a:t>
+            </a:r>
+            <a:r>
+              <a:rPr sz="1800" b="0">
+                <a:solidFill>
+                  <a:srgbClr val="000000"/>
+                </a:solidFill>
+                <a:latin typeface="맑은 고딕"/>
+                <a:ea typeface="맑은 고딕"/>
+              </a:rPr>
+              <a:t> —</a:t>
+            </a:r>
+            <a:r>
+              <a:rPr sz="1600" b="0">
+                <a:solidFill>
+                  <a:srgbClr val="000000"/>
+                </a:solidFill>
+                <a:latin typeface="맑은 고딕"/>
+                <a:ea typeface="맑은 고딕"/>
+              </a:rPr>
+              <a:t> 위험을 찾고, 기법을 고르고, 줄었는지 평가한다</a:t>
+            </a:r>
+          </a:p>
+          <a:p>
+            <a:pPr lvl="2" marL="723900" indent="-368300">
+              <a:spcBef>
+                <a:spcPts val="600"/>
+              </a:spcBef>
+              <a:spcAft>
+                <a:spcPts val="600"/>
+              </a:spcAft>
+              <a:buSzPct val="90000"/>
+              <a:buFont typeface="Wingdings" pitchFamily="2" charset="2"/>
+              <a:buChar char=""/>
+            </a:pPr>
+            <a:r>
+              <a:rPr sz="1800" b="1">
+                <a:solidFill>
+                  <a:srgbClr val="000000"/>
+                </a:solidFill>
+                <a:latin typeface="맑은 고딕"/>
+                <a:ea typeface="맑은 고딕"/>
+              </a:rPr>
+              <a:t>비용</a:t>
+            </a:r>
+            <a:r>
+              <a:rPr sz="1800" b="0">
+                <a:solidFill>
+                  <a:srgbClr val="000000"/>
+                </a:solidFill>
+                <a:latin typeface="맑은 고딕"/>
+                <a:ea typeface="맑은 고딕"/>
+              </a:rPr>
+              <a:t> —</a:t>
+            </a:r>
+            <a:r>
+              <a:rPr sz="1600" b="0">
+                <a:solidFill>
+                  <a:srgbClr val="000000"/>
+                </a:solidFill>
+                <a:latin typeface="맑은 고딕"/>
+                <a:ea typeface="맑은 고딕"/>
+              </a:rPr>
+              <a:t> 남긴 모델은 유지해야 한다. 코드에 없는 정보만 남긴다</a:t>
+            </a:r>
+          </a:p>
+          <a:p>
+            <a:pPr lvl="2" marL="723900" indent="-368300">
+              <a:spcBef>
+                <a:spcPts val="600"/>
+              </a:spcBef>
+              <a:spcAft>
+                <a:spcPts val="600"/>
+              </a:spcAft>
+              <a:buSzPct val="90000"/>
+              <a:buFont typeface="Wingdings" pitchFamily="2" charset="2"/>
+              <a:buChar char=""/>
+            </a:pPr>
+            <a:r>
+              <a:rPr sz="1800" b="1">
+                <a:solidFill>
+                  <a:srgbClr val="000000"/>
+                </a:solidFill>
+                <a:latin typeface="맑은 고딕"/>
+                <a:ea typeface="맑은 고딕"/>
+              </a:rPr>
+              <a:t>잘못된 관행</a:t>
+            </a:r>
+            <a:r>
+              <a:rPr sz="1800" b="0">
+                <a:solidFill>
+                  <a:srgbClr val="000000"/>
+                </a:solidFill>
+                <a:latin typeface="맑은 고딕"/>
+                <a:ea typeface="맑은 고딕"/>
+              </a:rPr>
+              <a:t> —</a:t>
+            </a:r>
+            <a:r>
+              <a:rPr sz="1600" b="0">
+                <a:solidFill>
+                  <a:srgbClr val="000000"/>
+                </a:solidFill>
+                <a:latin typeface="맑은 고딕"/>
+                <a:ea typeface="맑은 고딕"/>
+              </a:rPr>
+              <a:t> 분석 마비, 문서를 위한 모델, 위험 앞의 생략, 조립 없는 완료</a:t>
+            </a:r>
+          </a:p>
+          <a:p>
+            <a:pPr marL="342900" indent="0">
+              <a:spcBef>
+                <a:spcPts val="600"/>
+              </a:spcBef>
+              <a:spcAft>
+                <a:spcPts val="600"/>
+              </a:spcAft>
+              <a:buNone/>
+            </a:pPr>
+            <a:r>
+              <a:rPr sz="1800" b="1">
+                <a:solidFill>
+                  <a:srgbClr val="000000"/>
+                </a:solidFill>
+                <a:latin typeface="맑은 고딕"/>
+                <a:ea typeface="맑은 고딕"/>
+              </a:rPr>
+              <a:t>다음 세션</a:t>
+            </a:r>
+          </a:p>
+          <a:p>
+            <a:pPr lvl="2" marL="723900" indent="-368300">
+              <a:spcBef>
+                <a:spcPts val="600"/>
+              </a:spcBef>
+              <a:spcAft>
+                <a:spcPts val="600"/>
+              </a:spcAft>
+              <a:buSzPct val="90000"/>
+              <a:buFont typeface="Wingdings" pitchFamily="2" charset="2"/>
+              <a:buChar char=""/>
+            </a:pPr>
+            <a:r>
+              <a:rPr sz="1800" b="0">
+                <a:solidFill>
+                  <a:srgbClr val="000000"/>
+                </a:solidFill>
+                <a:latin typeface="맑은 고딕"/>
+                <a:ea typeface="맑은 고딕"/>
+              </a:rPr>
+              <a:t>"</a:t>
+            </a:r>
+            <a:r>
+              <a:rPr sz="1800" b="1">
+                <a:solidFill>
+                  <a:srgbClr val="000000"/>
+                </a:solidFill>
+                <a:latin typeface="맑은 고딕"/>
+                <a:ea typeface="맑은 고딕"/>
+              </a:rPr>
+              <a:t>12. 구현·검증·DevOps와 SW공학 피드백</a:t>
+            </a:r>
+            <a:r>
+              <a:rPr sz="1800" b="0">
+                <a:solidFill>
+                  <a:srgbClr val="000000"/>
+                </a:solidFill>
+                <a:latin typeface="맑은 고딕"/>
+                <a:ea typeface="맑은 고딕"/>
+              </a:rPr>
+              <a:t>" —</a:t>
+            </a:r>
+            <a:r>
+              <a:rPr sz="1600" b="0">
+                <a:solidFill>
+                  <a:srgbClr val="000000"/>
+                </a:solidFill>
+                <a:latin typeface="맑은 고딕"/>
+                <a:ea typeface="맑은 고딕"/>
+              </a:rPr>
+              <a:t> 구현·배포의 evidence로 다시 열 상위 판단을 진단한다.</a:t>
+            </a:r>
+          </a:p>
+        </p:txBody>
+      </p:sp>
+    </p:spTree>
+    <p:extLst>
+      <p:ext uri="{BB962C8B-B14F-4D97-AF65-F5344CB8AC3E}">
+        <p14:creationId xmlns:p14="http://schemas.microsoft.com/office/powerpoint/2010/main" val="3555436673"/>
+      </p:ext>
+    </p:extLst>
+  </p:cSld>
+  <p:clrMapOvr>
+    <a:masterClrMapping/>
+  </p:clrMapOvr>
+</p:sld>
+</file>
+
+<file path=ppt/slides/slide25.xml><?xml version="1.0" encoding="utf-8"?>
 <p:sld xmlns:a="http://schemas.openxmlformats.org/drawingml/2006/main" xmlns:r="http://schemas.openxmlformats.org/officeDocument/2006/relationships" xmlns:p="http://schemas.openxmlformats.org/presentationml/2006/main">
   <p:cSld>
     <p:spTree>
@@ -16763,7 +17271,7 @@
                 <a:latin typeface="맑은 고딕"/>
                 <a:ea typeface="맑은 고딕"/>
               </a:rPr>
-              <a:t>23. 통합 추적표 </a:t>
+              <a:t>통합 추적표 </a:t>
             </a:r>
             <a:r>
               <a:rPr sz="1800" b="1">
@@ -16774,6 +17282,18 @@
                 <a:ea typeface="맑은 고딕"/>
               </a:rPr>
               <a:t>(안)</a:t>
+            </a:r>
+          </a:p>
+          <a:p>
+            <a:r>
+              <a:rPr sz="1100" b="1">
+                <a:solidFill>
+                  <a:srgbClr val="000000"/>
+                </a:solidFill>
+                <a:latin typeface="맑은 고딕"/>
+                <a:ea typeface="맑은 고딕"/>
+              </a:rPr>
+              <a:t>별첨. 실습 답</a:t>
             </a:r>
           </a:p>
         </p:txBody>
@@ -16801,7 +17321,7 @@
           <a:p>
             <a:r>
               <a:rPr kumimoji="1" lang="en-US" altLang="ko-KR" sz="1400" dirty="0" err="1"/>
-              <a:t>11. 통합 설계와 적정 모델링</a:t>
+              <a:t>별첨: 11. 통합 설계와 적정 모델링</a:t>
             </a:r>
           </a:p>
         </p:txBody>
@@ -17040,7 +17560,7 @@
                           <a:ea typeface="맑은 고딕" panose="020B0503020000020004" pitchFamily="34" charset="-127"/>
                           <a:cs typeface="맑은 고딕"/>
                         </a:rPr>
-                        <a:t>이어지는가</a:t>
+                        <a:t>이어지는가?</a:t>
                       </a:r>
                     </a:p>
                   </a:txBody>
@@ -18235,7 +18755,7 @@
                 <a:ea typeface="맑은 고딕" panose="020B0503020000020004" pitchFamily="34" charset="-127"/>
                 <a:cs typeface="+mn-cs"/>
               </a:rPr>
-              <a:t>- 24 -</a:t>
+              <a:t>- 25 -</a:t>
             </a:r>
           </a:p>
         </p:txBody>
@@ -18345,7 +18865,7 @@
 </p:sld>
 </file>
 
-<file path=ppt/slides/slide25.xml><?xml version="1.0" encoding="utf-8"?>
+<file path=ppt/slides/slide26.xml><?xml version="1.0" encoding="utf-8"?>
 <p:sld xmlns:a="http://schemas.openxmlformats.org/drawingml/2006/main" xmlns:r="http://schemas.openxmlformats.org/officeDocument/2006/relationships" xmlns:p="http://schemas.openxmlformats.org/presentationml/2006/main">
   <p:cSld>
     <p:spTree>
@@ -18397,7 +18917,7 @@
                 <a:latin typeface="맑은 고딕"/>
                 <a:ea typeface="맑은 고딕"/>
               </a:rPr>
-              <a:t>24. 적정 모델링 판단 </a:t>
+              <a:t>적정 모델링 판단 </a:t>
             </a:r>
             <a:r>
               <a:rPr sz="1800" b="1">
@@ -18408,6 +18928,18 @@
                 <a:ea typeface="맑은 고딕"/>
               </a:rPr>
               <a:t>(안)</a:t>
+            </a:r>
+          </a:p>
+          <a:p>
+            <a:r>
+              <a:rPr sz="1100" b="1">
+                <a:solidFill>
+                  <a:srgbClr val="000000"/>
+                </a:solidFill>
+                <a:latin typeface="맑은 고딕"/>
+                <a:ea typeface="맑은 고딕"/>
+              </a:rPr>
+              <a:t>별첨. 실습 답</a:t>
             </a:r>
           </a:p>
         </p:txBody>
@@ -18435,7 +18967,7 @@
           <a:p>
             <a:r>
               <a:rPr kumimoji="1" lang="en-US" altLang="ko-KR" sz="1400" dirty="0" err="1"/>
-              <a:t>11. 통합 설계와 적정 모델링</a:t>
+              <a:t>별첨: 11. 통합 설계와 적정 모델링</a:t>
             </a:r>
           </a:p>
         </p:txBody>
@@ -19721,7 +20253,7 @@
                 <a:ea typeface="맑은 고딕" panose="020B0503020000020004" pitchFamily="34" charset="-127"/>
                 <a:cs typeface="+mn-cs"/>
               </a:rPr>
-              <a:t>- 25 -</a:t>
+              <a:t>- 26 -</a:t>
             </a:r>
           </a:p>
         </p:txBody>
@@ -19802,674 +20334,6 @@
     <p:extLst>
       <p:ext uri="{BB962C8B-B14F-4D97-AF65-F5344CB8AC3E}">
         <p14:creationId xmlns:p14="http://schemas.microsoft.com/office/powerpoint/2010/main" val="2789569477"/>
-      </p:ext>
-    </p:extLst>
-  </p:cSld>
-  <p:clrMapOvr>
-    <a:masterClrMapping/>
-  </p:clrMapOvr>
-</p:sld>
-</file>
-
-<file path=ppt/slides/slide26.xml><?xml version="1.0" encoding="utf-8"?>
-<p:sld xmlns:a="http://schemas.openxmlformats.org/drawingml/2006/main" xmlns:r="http://schemas.openxmlformats.org/officeDocument/2006/relationships" xmlns:p="http://schemas.openxmlformats.org/presentationml/2006/main">
-  <p:cSld>
-    <p:spTree>
-      <p:nvGrpSpPr>
-        <p:cNvPr id="1" name="">
-          <a:extLst>
-            <a:ext uri="{FF2B5EF4-FFF2-40B4-BE49-F238E27FC236}">
-              <a16:creationId xmlns:a16="http://schemas.microsoft.com/office/drawing/2014/main" id="{8E4F1F13-426B-086B-7D8C-9A58A0F879DB}"/>
-            </a:ext>
-          </a:extLst>
-        </p:cNvPr>
-        <p:cNvGrpSpPr/>
-        <p:nvPr/>
-      </p:nvGrpSpPr>
-      <p:grpSpPr>
-        <a:xfrm>
-          <a:off x="0" y="0"/>
-          <a:ext cx="0" cy="0"/>
-          <a:chOff x="0" y="0"/>
-          <a:chExt cx="0" cy="0"/>
-        </a:xfrm>
-      </p:grpSpPr>
-      <p:sp>
-        <p:nvSpPr>
-          <p:cNvPr id="2" name="제목 1">
-            <a:extLst>
-              <a:ext uri="{FF2B5EF4-FFF2-40B4-BE49-F238E27FC236}">
-                <a16:creationId xmlns:a16="http://schemas.microsoft.com/office/drawing/2014/main" id="{AA26A92D-924E-0575-9551-F8FD7BFD3FAD}"/>
-              </a:ext>
-            </a:extLst>
-          </p:cNvPr>
-          <p:cNvSpPr>
-            <a:spLocks noGrp="1"/>
-          </p:cNvSpPr>
-          <p:nvPr>
-            <p:ph type="title"/>
-          </p:nvPr>
-        </p:nvSpPr>
-        <p:spPr/>
-        <p:txBody>
-          <a:bodyPr/>
-          <a:lstStyle/>
-          <a:p>
-            <a:r>
-              <a:rPr sz="2400" b="1">
-                <a:solidFill>
-                  <a:srgbClr val="000000"/>
-                </a:solidFill>
-                <a:latin typeface="맑은 고딕"/>
-                <a:ea typeface="맑은 고딕"/>
-              </a:rPr>
-              <a:t>25. 통합 보완 </a:t>
-            </a:r>
-            <a:r>
-              <a:rPr sz="1800" b="1">
-                <a:solidFill>
-                  <a:srgbClr val="000000"/>
-                </a:solidFill>
-                <a:latin typeface="맑은 고딕"/>
-                <a:ea typeface="맑은 고딕"/>
-              </a:rPr>
-              <a:t>(안)</a:t>
-            </a:r>
-          </a:p>
-        </p:txBody>
-      </p:sp>
-      <p:sp>
-        <p:nvSpPr>
-          <p:cNvPr id="3" name="슬라이드 번호 개체 틀 2">
-            <a:extLst>
-              <a:ext uri="{FF2B5EF4-FFF2-40B4-BE49-F238E27FC236}">
-                <a16:creationId xmlns:a16="http://schemas.microsoft.com/office/drawing/2014/main" id="{12CF30EE-4DFD-8063-56B8-B8689E76DFCA}"/>
-              </a:ext>
-            </a:extLst>
-          </p:cNvPr>
-          <p:cNvSpPr>
-            <a:spLocks noGrp="1"/>
-          </p:cNvSpPr>
-          <p:nvPr>
-            <p:ph type="sldNum" sz="quarter" idx="10"/>
-          </p:nvPr>
-        </p:nvSpPr>
-        <p:spPr/>
-        <p:txBody>
-          <a:bodyPr/>
-          <a:lstStyle/>
-          <a:p>
-            <a:pPr>
-              <a:defRPr/>
-            </a:pPr>
-            <a:r>
-              <a:rPr lang="en-US" altLang="ko-KR">
-                <a:solidFill>
-                  <a:prstClr val="black"/>
-                </a:solidFill>
-              </a:rPr>
-              <a:t>- 26 -</a:t>
-            </a:r>
-          </a:p>
-        </p:txBody>
-      </p:sp>
-      <p:sp>
-        <p:nvSpPr>
-          <p:cNvPr id="5" name="텍스트 개체 틀 4">
-            <a:extLst>
-              <a:ext uri="{FF2B5EF4-FFF2-40B4-BE49-F238E27FC236}">
-                <a16:creationId xmlns:a16="http://schemas.microsoft.com/office/drawing/2014/main" id="{D66274C8-E16F-5AEB-614B-D8D32DA3E8C6}"/>
-              </a:ext>
-            </a:extLst>
-          </p:cNvPr>
-          <p:cNvSpPr>
-            <a:spLocks noGrp="1"/>
-          </p:cNvSpPr>
-          <p:nvPr>
-            <p:ph type="body" sz="quarter" idx="11"/>
-          </p:nvPr>
-        </p:nvSpPr>
-        <p:spPr/>
-        <p:txBody>
-          <a:bodyPr/>
-          <a:lstStyle/>
-          <a:p>
-            <a:r>
-              <a:rPr kumimoji="1" lang="en-US" altLang="ko-KR" sz="1400" dirty="0" err="1"/>
-              <a:t>11. 통합 설계와 적정 모델링</a:t>
-            </a:r>
-          </a:p>
-        </p:txBody>
-      </p:sp>
-      <p:sp>
-        <p:nvSpPr>
-          <p:cNvPr id="6" name="텍스트 개체 틀 5">
-            <a:extLst>
-              <a:ext uri="{FF2B5EF4-FFF2-40B4-BE49-F238E27FC236}">
-                <a16:creationId xmlns:a16="http://schemas.microsoft.com/office/drawing/2014/main" id="{A24E58E1-194B-A320-AEEE-24D08685BB67}"/>
-              </a:ext>
-            </a:extLst>
-          </p:cNvPr>
-          <p:cNvSpPr>
-            <a:spLocks noGrp="1"/>
-          </p:cNvSpPr>
-          <p:nvPr>
-            <p:ph type="body" sz="quarter" idx="12"/>
-          </p:nvPr>
-        </p:nvSpPr>
-        <p:spPr/>
-        <p:txBody>
-          <a:bodyPr/>
-          <a:lstStyle/>
-          <a:p>
-            <a:endParaRPr kumimoji="1" lang="ko-KR" altLang="en-US" dirty="0"/>
-          </a:p>
-        </p:txBody>
-      </p:sp>
-      <p:sp>
-        <p:nvSpPr>
-          <p:cNvPr id="7" name="텍스트 개체 틀 6">
-            <a:extLst>
-              <a:ext uri="{FF2B5EF4-FFF2-40B4-BE49-F238E27FC236}">
-                <a16:creationId xmlns:a16="http://schemas.microsoft.com/office/drawing/2014/main" id="{A219F420-613B-6234-45F6-0955A9A4505F}"/>
-              </a:ext>
-            </a:extLst>
-          </p:cNvPr>
-          <p:cNvSpPr>
-            <a:spLocks noGrp="1"/>
-          </p:cNvSpPr>
-          <p:nvPr>
-            <p:ph type="body" sz="quarter" idx="13"/>
-          </p:nvPr>
-        </p:nvSpPr>
-        <p:spPr/>
-        <p:txBody>
-          <a:bodyPr/>
-          <a:lstStyle/>
-          <a:p>
-            <a:endParaRPr kumimoji="1" lang="en-US" altLang="ko-KR" dirty="0"/>
-          </a:p>
-        </p:txBody>
-      </p:sp>
-      <p:sp>
-        <p:nvSpPr>
-          <p:cNvPr id="8" name="내용 개체 틀 7">
-            <a:extLst>
-              <a:ext uri="{FF2B5EF4-FFF2-40B4-BE49-F238E27FC236}">
-                <a16:creationId xmlns:a16="http://schemas.microsoft.com/office/drawing/2014/main" id="{BEBA2C4A-B0BF-F2E4-EA6E-614C99CBA184}"/>
-              </a:ext>
-            </a:extLst>
-          </p:cNvPr>
-          <p:cNvSpPr>
-            <a:spLocks noGrp="1"/>
-          </p:cNvSpPr>
-          <p:nvPr>
-            <p:ph idx="1"/>
-          </p:nvPr>
-        </p:nvSpPr>
-        <p:spPr>
-          <a:xfrm>
-            <a:off x="233172" y="1414318"/>
-            <a:ext cx="4338828" cy="4898147"/>
-          </a:xfrm>
-        </p:spPr>
-        <p:txBody>
-          <a:bodyPr>
-            <a:normAutofit/>
-          </a:bodyPr>
-          <a:lstStyle/>
-          <a:p>
-            <a:pPr lvl="2" marL="228600" indent="-182880">
-              <a:spcBef>
-                <a:spcPts val="300"/>
-              </a:spcBef>
-              <a:spcAft>
-                <a:spcPts val="300"/>
-              </a:spcAft>
-              <a:buSzPct val="90000"/>
-              <a:buFont typeface="Wingdings" pitchFamily="2" charset="2"/>
-              <a:buChar char=""/>
-            </a:pPr>
-            <a:r>
-              <a:rPr sz="1400" b="1">
-                <a:solidFill>
-                  <a:srgbClr val="000000"/>
-                </a:solidFill>
-                <a:latin typeface="맑은 고딕"/>
-                <a:ea typeface="맑은 고딕"/>
-              </a:rPr>
-              <a:t>유스케이스 명세서</a:t>
-            </a:r>
-            <a:r>
-              <a:rPr sz="1000" b="0">
-                <a:solidFill>
-                  <a:srgbClr val="000000"/>
-                </a:solidFill>
-                <a:latin typeface="맑은 고딕"/>
-                <a:ea typeface="맑은 고딕"/>
-              </a:rPr>
-              <a:t>(실습 2)</a:t>
-            </a:r>
-          </a:p>
-          <a:p>
-            <a:pPr lvl="3" marL="457200" indent="-182880">
-              <a:spcBef>
-                <a:spcPts val="300"/>
-              </a:spcBef>
-              <a:spcAft>
-                <a:spcPts val="300"/>
-              </a:spcAft>
-              <a:buSzPct val="90000"/>
-              <a:buFont typeface="Wingdings" pitchFamily="2" charset="2"/>
-              <a:buChar char=""/>
-            </a:pPr>
-            <a:r>
-              <a:rPr sz="1200" b="1">
-                <a:solidFill>
-                  <a:srgbClr val="000000"/>
-                </a:solidFill>
-                <a:latin typeface="맑은 고딕"/>
-                <a:ea typeface="맑은 고딕"/>
-              </a:rPr>
-              <a:t>새 흐름</a:t>
-            </a:r>
-            <a:r>
-              <a:rPr sz="1200" b="0">
-                <a:solidFill>
-                  <a:srgbClr val="000000"/>
-                </a:solidFill>
-                <a:latin typeface="맑은 고딕"/>
-                <a:ea typeface="맑은 고딕"/>
-              </a:rPr>
-              <a:t> —</a:t>
-            </a:r>
-            <a:r>
-              <a:rPr sz="1000" b="0">
-                <a:solidFill>
-                  <a:srgbClr val="000000"/>
-                </a:solidFill>
-                <a:latin typeface="맑은 고딕"/>
-                <a:ea typeface="맑은 고딕"/>
-              </a:rPr>
-              <a:t> 청구된 회차의 취소 → 회차 금액 환불 요청</a:t>
-            </a:r>
-          </a:p>
-          <a:p>
-            <a:pPr lvl="2" marL="228600" indent="-182880">
-              <a:spcBef>
-                <a:spcPts val="300"/>
-              </a:spcBef>
-              <a:spcAft>
-                <a:spcPts val="300"/>
-              </a:spcAft>
-              <a:buSzPct val="90000"/>
-              <a:buFont typeface="Wingdings" pitchFamily="2" charset="2"/>
-              <a:buChar char=""/>
-            </a:pPr>
-            <a:r>
-              <a:rPr sz="1400" b="1">
-                <a:solidFill>
-                  <a:srgbClr val="000000"/>
-                </a:solidFill>
-                <a:latin typeface="맑은 고딕"/>
-                <a:ea typeface="맑은 고딕"/>
-              </a:rPr>
-              <a:t>동적 모델</a:t>
-            </a:r>
-            <a:r>
-              <a:rPr sz="1000" b="0">
-                <a:solidFill>
-                  <a:srgbClr val="000000"/>
-                </a:solidFill>
-                <a:latin typeface="맑은 고딕"/>
-                <a:ea typeface="맑은 고딕"/>
-              </a:rPr>
-              <a:t>(실습 4)</a:t>
-            </a:r>
-          </a:p>
-          <a:p>
-            <a:pPr lvl="3" marL="457200" indent="-182880">
-              <a:spcBef>
-                <a:spcPts val="300"/>
-              </a:spcBef>
-              <a:spcAft>
-                <a:spcPts val="300"/>
-              </a:spcAft>
-              <a:buSzPct val="90000"/>
-              <a:buFont typeface="Wingdings" pitchFamily="2" charset="2"/>
-              <a:buChar char=""/>
-            </a:pPr>
-            <a:r>
-              <a:rPr sz="1200" b="1">
-                <a:solidFill>
-                  <a:srgbClr val="000000"/>
-                </a:solidFill>
-                <a:latin typeface="맑은 고딕"/>
-                <a:ea typeface="맑은 고딕"/>
-              </a:rPr>
-              <a:t>새 모델</a:t>
-            </a:r>
-            <a:r>
-              <a:rPr sz="1200" b="0">
-                <a:solidFill>
-                  <a:srgbClr val="000000"/>
-                </a:solidFill>
-                <a:latin typeface="맑은 고딕"/>
-                <a:ea typeface="맑은 고딕"/>
-              </a:rPr>
-              <a:t> —</a:t>
-            </a:r>
-            <a:r>
-              <a:rPr sz="1000" b="0">
-                <a:solidFill>
-                  <a:srgbClr val="000000"/>
-                </a:solidFill>
-                <a:latin typeface="맑은 고딕"/>
-                <a:ea typeface="맑은 고딕"/>
-              </a:rPr>
-              <a:t> 회차 상태 기계: 예정 → 청구됨 → 배송됨, 예정 → 취소됨, 청구됨 → 환불 대기 → 취소됨</a:t>
-            </a:r>
-          </a:p>
-        </p:txBody>
-      </p:sp>
-      <p:sp>
-        <p:nvSpPr>
-          <p:cNvPr id="9" name="내용 개체 틀 7">
-            <a:extLst>
-              <a:ext uri="{FF2B5EF4-FFF2-40B4-BE49-F238E27FC236}">
-                <a16:creationId xmlns:a16="http://schemas.microsoft.com/office/drawing/2014/main" id="{BEBA2C4A-B0BF-F2E4-EA6E-614C99CBA184}"/>
-              </a:ext>
-            </a:extLst>
-          </p:cNvPr>
-          <p:cNvSpPr>
-            <a:spLocks noGrp="1"/>
-          </p:cNvSpPr>
-          <p:nvPr>
-            <p:ph idx="1"/>
-          </p:nvPr>
-        </p:nvSpPr>
-        <p:spPr>
-          <a:xfrm>
-            <a:off x="233172" y="960120"/>
-            <a:ext cx="8778240" cy="454198"/>
-          </a:xfrm>
-        </p:spPr>
-        <p:txBody>
-          <a:bodyPr>
-            <a:normAutofit/>
-          </a:bodyPr>
-          <a:lstStyle/>
-          <a:p>
-            <a:pPr marL="0" indent="0">
-              <a:spcBef>
-                <a:spcPts val="300"/>
-              </a:spcBef>
-              <a:spcAft>
-                <a:spcPts val="300"/>
-              </a:spcAft>
-              <a:buNone/>
-            </a:pPr>
-            <a:r>
-              <a:rPr sz="1400" b="0">
-                <a:solidFill>
-                  <a:srgbClr val="000000"/>
-                </a:solidFill>
-                <a:latin typeface="맑은 고딕"/>
-                <a:ea typeface="맑은 고딕"/>
-              </a:rPr>
-              <a:t>통합에서 발견한 것은 </a:t>
-            </a:r>
-            <a:r>
-              <a:rPr sz="1400" b="1">
-                <a:solidFill>
-                  <a:srgbClr val="000000"/>
-                </a:solidFill>
-                <a:latin typeface="맑은 고딕"/>
-                <a:ea typeface="맑은 고딕"/>
-              </a:rPr>
-              <a:t>후속 작업에 영향을 미치는 경우에만</a:t>
-            </a:r>
-            <a:r>
-              <a:rPr sz="1400" b="0">
-                <a:solidFill>
-                  <a:srgbClr val="000000"/>
-                </a:solidFill>
-                <a:latin typeface="맑은 고딕"/>
-                <a:ea typeface="맑은 고딕"/>
-              </a:rPr>
-              <a:t> 이전 산출물에 반영한다.</a:t>
-            </a:r>
-          </a:p>
-        </p:txBody>
-      </p:sp>
-      <p:sp>
-        <p:nvSpPr>
-          <p:cNvPr id="10" name="내용 개체 틀 7">
-            <a:extLst>
-              <a:ext uri="{FF2B5EF4-FFF2-40B4-BE49-F238E27FC236}">
-                <a16:creationId xmlns:a16="http://schemas.microsoft.com/office/drawing/2014/main" id="{BEBA2C4A-B0BF-F2E4-EA6E-614C99CBA184}"/>
-              </a:ext>
-            </a:extLst>
-          </p:cNvPr>
-          <p:cNvSpPr>
-            <a:spLocks noGrp="1"/>
-          </p:cNvSpPr>
-          <p:nvPr>
-            <p:ph idx="1"/>
-          </p:nvPr>
-        </p:nvSpPr>
-        <p:spPr>
-          <a:xfrm>
-            <a:off x="4572000" y="1414318"/>
-            <a:ext cx="4439412" cy="4898147"/>
-          </a:xfrm>
-        </p:spPr>
-        <p:txBody>
-          <a:bodyPr>
-            <a:normAutofit/>
-          </a:bodyPr>
-          <a:lstStyle/>
-          <a:p>
-            <a:pPr lvl="2" marL="228600" indent="-182880">
-              <a:spcBef>
-                <a:spcPts val="300"/>
-              </a:spcBef>
-              <a:spcAft>
-                <a:spcPts val="300"/>
-              </a:spcAft>
-              <a:buSzPct val="90000"/>
-              <a:buFont typeface="Wingdings" pitchFamily="2" charset="2"/>
-              <a:buChar char=""/>
-            </a:pPr>
-            <a:r>
-              <a:rPr sz="1400" b="1">
-                <a:solidFill>
-                  <a:srgbClr val="000000"/>
-                </a:solidFill>
-                <a:latin typeface="맑은 고딕"/>
-                <a:ea typeface="맑은 고딕"/>
-              </a:rPr>
-              <a:t>용어집</a:t>
-            </a:r>
-            <a:r>
-              <a:rPr sz="1000" b="0">
-                <a:solidFill>
-                  <a:srgbClr val="000000"/>
-                </a:solidFill>
-                <a:latin typeface="맑은 고딕"/>
-                <a:ea typeface="맑은 고딕"/>
-              </a:rPr>
-              <a:t>(실습 2)</a:t>
-            </a:r>
-          </a:p>
-          <a:p>
-            <a:pPr lvl="3" marL="457200" indent="-182880">
-              <a:spcBef>
-                <a:spcPts val="300"/>
-              </a:spcBef>
-              <a:spcAft>
-                <a:spcPts val="300"/>
-              </a:spcAft>
-              <a:buSzPct val="90000"/>
-              <a:buFont typeface="Wingdings" pitchFamily="2" charset="2"/>
-              <a:buChar char=""/>
-            </a:pPr>
-            <a:r>
-              <a:rPr sz="1200" b="1">
-                <a:solidFill>
-                  <a:srgbClr val="000000"/>
-                </a:solidFill>
-                <a:latin typeface="맑은 고딕"/>
-                <a:ea typeface="맑은 고딕"/>
-              </a:rPr>
-              <a:t>새 용어</a:t>
-            </a:r>
-            <a:r>
-              <a:rPr sz="1200" b="0">
-                <a:solidFill>
-                  <a:srgbClr val="000000"/>
-                </a:solidFill>
-                <a:latin typeface="맑은 고딕"/>
-                <a:ea typeface="맑은 고딕"/>
-              </a:rPr>
-              <a:t> —</a:t>
-            </a:r>
-            <a:r>
-              <a:rPr sz="1000" b="0">
-                <a:solidFill>
-                  <a:srgbClr val="000000"/>
-                </a:solidFill>
-                <a:latin typeface="맑은 고딕"/>
-                <a:ea typeface="맑은 고딕"/>
-              </a:rPr>
-              <a:t> 회차 상태의 다섯 값</a:t>
-            </a:r>
-            <a:r>
-              <a:rPr sz="800" b="0">
-                <a:solidFill>
-                  <a:srgbClr val="000000"/>
-                </a:solidFill>
-                <a:latin typeface="맑은 고딕"/>
-                <a:ea typeface="맑은 고딕"/>
-              </a:rPr>
-              <a:t>(예정·청구됨·배송됨·환불 대기·취소됨)</a:t>
-            </a:r>
-          </a:p>
-          <a:p>
-            <a:pPr lvl="2" marL="228600" indent="-182880">
-              <a:spcBef>
-                <a:spcPts val="300"/>
-              </a:spcBef>
-              <a:spcAft>
-                <a:spcPts val="300"/>
-              </a:spcAft>
-              <a:buSzPct val="90000"/>
-              <a:buFont typeface="Wingdings" pitchFamily="2" charset="2"/>
-              <a:buChar char=""/>
-            </a:pPr>
-            <a:r>
-              <a:rPr sz="1400" b="1">
-                <a:solidFill>
-                  <a:srgbClr val="000000"/>
-                </a:solidFill>
-                <a:latin typeface="맑은 고딕"/>
-                <a:ea typeface="맑은 고딕"/>
-              </a:rPr>
-              <a:t>※ 현행화 기준</a:t>
-            </a:r>
-          </a:p>
-          <a:p>
-            <a:pPr lvl="3" marL="457200" indent="-182880">
-              <a:spcBef>
-                <a:spcPts val="300"/>
-              </a:spcBef>
-              <a:spcAft>
-                <a:spcPts val="300"/>
-              </a:spcAft>
-              <a:buSzPct val="90000"/>
-              <a:buFont typeface="Wingdings" pitchFamily="2" charset="2"/>
-              <a:buChar char=""/>
-            </a:pPr>
-            <a:r>
-              <a:rPr sz="1200" b="1">
-                <a:solidFill>
-                  <a:srgbClr val="000000"/>
-                </a:solidFill>
-                <a:latin typeface="맑은 고딕"/>
-                <a:ea typeface="맑은 고딕"/>
-              </a:rPr>
-              <a:t>반영</a:t>
-            </a:r>
-            <a:r>
-              <a:rPr sz="1200" b="0">
-                <a:solidFill>
-                  <a:srgbClr val="000000"/>
-                </a:solidFill>
-                <a:latin typeface="맑은 고딕"/>
-                <a:ea typeface="맑은 고딕"/>
-              </a:rPr>
-              <a:t> —</a:t>
-            </a:r>
-            <a:r>
-              <a:rPr sz="1000" b="0">
-                <a:solidFill>
-                  <a:srgbClr val="000000"/>
-                </a:solidFill>
-                <a:latin typeface="맑은 고딕"/>
-                <a:ea typeface="맑은 고딕"/>
-              </a:rPr>
-              <a:t> 유스케이스, 상태 기계, 용어집. 구현·검증의 입력이 된다.</a:t>
-            </a:r>
-          </a:p>
-          <a:p>
-            <a:pPr lvl="3" marL="457200" indent="-182880">
-              <a:spcBef>
-                <a:spcPts val="300"/>
-              </a:spcBef>
-              <a:spcAft>
-                <a:spcPts val="300"/>
-              </a:spcAft>
-              <a:buSzPct val="90000"/>
-              <a:buFont typeface="Wingdings" pitchFamily="2" charset="2"/>
-              <a:buChar char=""/>
-            </a:pPr>
-            <a:r>
-              <a:rPr sz="1200" b="1">
-                <a:solidFill>
-                  <a:srgbClr val="000000"/>
-                </a:solidFill>
-                <a:latin typeface="맑은 고딕"/>
-                <a:ea typeface="맑은 고딕"/>
-              </a:rPr>
-              <a:t>기록만</a:t>
-            </a:r>
-            <a:r>
-              <a:rPr sz="1200" b="0">
-                <a:solidFill>
-                  <a:srgbClr val="000000"/>
-                </a:solidFill>
-                <a:latin typeface="맑은 고딕"/>
-                <a:ea typeface="맑은 고딕"/>
-              </a:rPr>
-              <a:t> —</a:t>
-            </a:r>
-            <a:r>
-              <a:rPr sz="1000" b="0">
-                <a:solidFill>
-                  <a:srgbClr val="000000"/>
-                </a:solidFill>
-                <a:latin typeface="맑은 고딕"/>
-                <a:ea typeface="맑은 고딕"/>
-              </a:rPr>
-              <a:t> 영수증을 그리지 않은 이유.</a:t>
-            </a:r>
-          </a:p>
-        </p:txBody>
-      </p:sp>
-    </p:spTree>
-    <p:extLst>
-      <p:ext uri="{BB962C8B-B14F-4D97-AF65-F5344CB8AC3E}">
-        <p14:creationId xmlns:p14="http://schemas.microsoft.com/office/powerpoint/2010/main" val="3555436673"/>
       </p:ext>
     </p:extLst>
   </p:cSld>
@@ -20531,7 +20395,29 @@
                 <a:latin typeface="맑은 고딕"/>
                 <a:ea typeface="맑은 고딕"/>
               </a:rPr>
-              <a:t>26. 요약</a:t>
+              <a:t>통합 보완 </a:t>
+            </a:r>
+            <a:r>
+              <a:rPr sz="1800" b="1">
+                <a:solidFill>
+                  <a:srgbClr val="000000"/>
+                </a:solidFill>
+                <a:latin typeface="맑은 고딕"/>
+                <a:ea typeface="맑은 고딕"/>
+              </a:rPr>
+              <a:t>(안)</a:t>
+            </a:r>
+          </a:p>
+          <a:p>
+            <a:r>
+              <a:rPr sz="1100" b="1">
+                <a:solidFill>
+                  <a:srgbClr val="000000"/>
+                </a:solidFill>
+                <a:latin typeface="맑은 고딕"/>
+                <a:ea typeface="맑은 고딕"/>
+              </a:rPr>
+              <a:t>별첨. 실습 답</a:t>
             </a:r>
           </a:p>
         </p:txBody>
@@ -20594,7 +20480,7 @@
           <a:p>
             <a:r>
               <a:rPr kumimoji="1" lang="en-US" altLang="ko-KR" sz="1400" dirty="0" err="1"/>
-              <a:t>11. 통합 설계와 적정 모델링</a:t>
+              <a:t>별첨: 11. 통합 설계와 적정 모델링</a:t>
             </a:r>
           </a:p>
         </p:txBody>
@@ -20665,270 +20551,401 @@
             <p:ph idx="1"/>
           </p:nvPr>
         </p:nvSpPr>
-        <p:spPr/>
+        <p:spPr>
+          <a:xfrm>
+            <a:off x="233172" y="1414318"/>
+            <a:ext cx="4338828" cy="4898147"/>
+          </a:xfrm>
+        </p:spPr>
         <p:txBody>
           <a:bodyPr>
             <a:normAutofit/>
           </a:bodyPr>
           <a:lstStyle/>
           <a:p>
-            <a:pPr marL="0" indent="0">
+            <a:pPr lvl="2" marL="228600" indent="-182880">
               <a:spcBef>
-                <a:spcPts val="600"/>
+                <a:spcPts val="300"/>
               </a:spcBef>
               <a:spcAft>
-                <a:spcPts val="600"/>
-              </a:spcAft>
-              <a:buNone/>
-            </a:pPr>
-            <a:r>
-              <a:rPr sz="1800" b="0">
-                <a:solidFill>
-                  <a:srgbClr val="000000"/>
-                </a:solidFill>
-                <a:latin typeface="맑은 고딕"/>
-                <a:ea typeface="맑은 고딕"/>
-              </a:rPr>
-              <a:t>이 세션은 모델들을 </a:t>
-            </a:r>
-            <a:r>
-              <a:rPr sz="1800" b="1">
-                <a:solidFill>
-                  <a:srgbClr val="000000"/>
-                </a:solidFill>
-                <a:latin typeface="맑은 고딕"/>
-                <a:ea typeface="맑은 고딕"/>
-              </a:rPr>
-              <a:t>하나의 사례로 통합</a:t>
-            </a:r>
-            <a:r>
-              <a:rPr sz="1800" b="0">
-                <a:solidFill>
-                  <a:srgbClr val="000000"/>
-                </a:solidFill>
-                <a:latin typeface="맑은 고딕"/>
-                <a:ea typeface="맑은 고딕"/>
-              </a:rPr>
-              <a:t>하고, 추가 모델링의 가치와 비용을 판단했다.</a:t>
-            </a:r>
-          </a:p>
-          <a:p>
-            <a:pPr marL="342900" indent="0">
-              <a:spcBef>
-                <a:spcPts val="600"/>
-              </a:spcBef>
-              <a:spcAft>
-                <a:spcPts val="600"/>
-              </a:spcAft>
-              <a:buNone/>
-            </a:pPr>
-            <a:r>
-              <a:rPr sz="1800" b="1">
-                <a:solidFill>
-                  <a:srgbClr val="000000"/>
-                </a:solidFill>
-                <a:latin typeface="맑은 고딕"/>
-                <a:ea typeface="맑은 고딕"/>
-              </a:rPr>
-              <a:t>통합 설계와 적정 모델링의 핵심</a:t>
-            </a:r>
-          </a:p>
-          <a:p>
-            <a:pPr lvl="2" marL="723900" indent="-368300">
-              <a:spcBef>
-                <a:spcPts val="600"/>
-              </a:spcBef>
-              <a:spcAft>
-                <a:spcPts val="600"/>
+                <a:spcPts val="300"/>
               </a:spcAft>
               <a:buSzPct val="90000"/>
               <a:buFont typeface="Wingdings" pitchFamily="2" charset="2"/>
               <a:buChar char=""/>
             </a:pPr>
             <a:r>
-              <a:rPr sz="1800" b="1">
-                <a:solidFill>
-                  <a:srgbClr val="000000"/>
-                </a:solidFill>
-                <a:latin typeface="맑은 고딕"/>
-                <a:ea typeface="맑은 고딕"/>
-              </a:rPr>
-              <a:t>원칙</a:t>
-            </a:r>
-            <a:r>
-              <a:rPr sz="1800" b="0">
-                <a:solidFill>
-                  <a:srgbClr val="000000"/>
-                </a:solidFill>
-                <a:latin typeface="맑은 고딕"/>
-                <a:ea typeface="맑은 고딕"/>
-              </a:rPr>
-              <a:t> —</a:t>
-            </a:r>
-            <a:r>
-              <a:rPr sz="1600" b="0">
-                <a:solidFill>
-                  <a:srgbClr val="000000"/>
-                </a:solidFill>
-                <a:latin typeface="맑은 고딕"/>
-                <a:ea typeface="맑은 고딕"/>
-              </a:rPr>
-              <a:t> 모델의 가치는 답한 질문과 줄인 위험이다. 판단이 나아지지 않으면 멈춘다</a:t>
-            </a:r>
-          </a:p>
-          <a:p>
-            <a:pPr lvl="2" marL="723900" indent="-368300">
+              <a:rPr sz="1400" b="1">
+                <a:solidFill>
+                  <a:srgbClr val="000000"/>
+                </a:solidFill>
+                <a:latin typeface="맑은 고딕"/>
+                <a:ea typeface="맑은 고딕"/>
+              </a:rPr>
+              <a:t>유스케이스 명세서</a:t>
+            </a:r>
+            <a:r>
+              <a:rPr sz="1000" b="0">
+                <a:solidFill>
+                  <a:srgbClr val="000000"/>
+                </a:solidFill>
+                <a:latin typeface="맑은 고딕"/>
+                <a:ea typeface="맑은 고딕"/>
+              </a:rPr>
+              <a:t>(실습 2)</a:t>
+            </a:r>
+          </a:p>
+          <a:p>
+            <a:pPr lvl="3" marL="457200" indent="-182880">
               <a:spcBef>
-                <a:spcPts val="600"/>
+                <a:spcPts val="300"/>
               </a:spcBef>
               <a:spcAft>
-                <a:spcPts val="600"/>
+                <a:spcPts val="300"/>
+              </a:spcAft>
+              <a:buSzPct val="90000"/>
+              <a:buFont typeface="Wingdings" pitchFamily="2" charset="2"/>
+              <a:buChar char=""/>
+            </a:pPr>
+            <a:r>
+              <a:rPr sz="1200" b="1">
+                <a:solidFill>
+                  <a:srgbClr val="000000"/>
+                </a:solidFill>
+                <a:latin typeface="맑은 고딕"/>
+                <a:ea typeface="맑은 고딕"/>
+              </a:rPr>
+              <a:t>새 흐름</a:t>
+            </a:r>
+            <a:r>
+              <a:rPr sz="1200" b="0">
+                <a:solidFill>
+                  <a:srgbClr val="000000"/>
+                </a:solidFill>
+                <a:latin typeface="맑은 고딕"/>
+                <a:ea typeface="맑은 고딕"/>
+              </a:rPr>
+              <a:t> —</a:t>
+            </a:r>
+            <a:r>
+              <a:rPr sz="1000" b="0">
+                <a:solidFill>
+                  <a:srgbClr val="000000"/>
+                </a:solidFill>
+                <a:latin typeface="맑은 고딕"/>
+                <a:ea typeface="맑은 고딕"/>
+              </a:rPr>
+              <a:t> 청구된 회차의 취소 → 회차 금액 환불 요청</a:t>
+            </a:r>
+          </a:p>
+          <a:p>
+            <a:pPr lvl="2" marL="228600" indent="-182880">
+              <a:spcBef>
+                <a:spcPts val="300"/>
+              </a:spcBef>
+              <a:spcAft>
+                <a:spcPts val="300"/>
               </a:spcAft>
               <a:buSzPct val="90000"/>
               <a:buFont typeface="Wingdings" pitchFamily="2" charset="2"/>
               <a:buChar char=""/>
             </a:pPr>
             <a:r>
-              <a:rPr sz="1800" b="1">
-                <a:solidFill>
-                  <a:srgbClr val="000000"/>
-                </a:solidFill>
-                <a:latin typeface="맑은 고딕"/>
-                <a:ea typeface="맑은 고딕"/>
-              </a:rPr>
-              <a:t>통합</a:t>
-            </a:r>
-            <a:r>
-              <a:rPr sz="1800" b="0">
-                <a:solidFill>
-                  <a:srgbClr val="000000"/>
-                </a:solidFill>
-                <a:latin typeface="맑은 고딕"/>
-                <a:ea typeface="맑은 고딕"/>
-              </a:rPr>
-              <a:t> —</a:t>
-            </a:r>
-            <a:r>
-              <a:rPr sz="1600" b="0">
-                <a:solidFill>
-                  <a:srgbClr val="000000"/>
-                </a:solidFill>
-                <a:latin typeface="맑은 고딕"/>
-                <a:ea typeface="맑은 고딕"/>
-              </a:rPr>
-              <a:t> 주문 O-1의 취소를 요구부터 저장까지 추적하고 실제로 조립한다</a:t>
-            </a:r>
-          </a:p>
-          <a:p>
-            <a:pPr lvl="2" marL="723900" indent="-368300">
+              <a:rPr sz="1400" b="1">
+                <a:solidFill>
+                  <a:srgbClr val="000000"/>
+                </a:solidFill>
+                <a:latin typeface="맑은 고딕"/>
+                <a:ea typeface="맑은 고딕"/>
+              </a:rPr>
+              <a:t>동적 모델</a:t>
+            </a:r>
+            <a:r>
+              <a:rPr sz="1000" b="0">
+                <a:solidFill>
+                  <a:srgbClr val="000000"/>
+                </a:solidFill>
+                <a:latin typeface="맑은 고딕"/>
+                <a:ea typeface="맑은 고딕"/>
+              </a:rPr>
+              <a:t>(실습 4)</a:t>
+            </a:r>
+          </a:p>
+          <a:p>
+            <a:pPr lvl="3" marL="457200" indent="-182880">
               <a:spcBef>
-                <a:spcPts val="600"/>
+                <a:spcPts val="300"/>
               </a:spcBef>
               <a:spcAft>
-                <a:spcPts val="600"/>
+                <a:spcPts val="300"/>
+              </a:spcAft>
+              <a:buSzPct val="90000"/>
+              <a:buFont typeface="Wingdings" pitchFamily="2" charset="2"/>
+              <a:buChar char=""/>
+            </a:pPr>
+            <a:r>
+              <a:rPr sz="1200" b="1">
+                <a:solidFill>
+                  <a:srgbClr val="000000"/>
+                </a:solidFill>
+                <a:latin typeface="맑은 고딕"/>
+                <a:ea typeface="맑은 고딕"/>
+              </a:rPr>
+              <a:t>새 모델</a:t>
+            </a:r>
+            <a:r>
+              <a:rPr sz="1200" b="0">
+                <a:solidFill>
+                  <a:srgbClr val="000000"/>
+                </a:solidFill>
+                <a:latin typeface="맑은 고딕"/>
+                <a:ea typeface="맑은 고딕"/>
+              </a:rPr>
+              <a:t> —</a:t>
+            </a:r>
+            <a:r>
+              <a:rPr sz="1000" b="0">
+                <a:solidFill>
+                  <a:srgbClr val="000000"/>
+                </a:solidFill>
+                <a:latin typeface="맑은 고딕"/>
+                <a:ea typeface="맑은 고딕"/>
+              </a:rPr>
+              <a:t> 회차 상태 기계: 예정 → 청구됨 → 배송됨, 예정 → 취소됨, 청구됨 → 환불 대기 → 취소됨</a:t>
+            </a:r>
+          </a:p>
+        </p:txBody>
+      </p:sp>
+      <p:sp>
+        <p:nvSpPr>
+          <p:cNvPr id="9" name="내용 개체 틀 7">
+            <a:extLst>
+              <a:ext uri="{FF2B5EF4-FFF2-40B4-BE49-F238E27FC236}">
+                <a16:creationId xmlns:a16="http://schemas.microsoft.com/office/drawing/2014/main" id="{BEBA2C4A-B0BF-F2E4-EA6E-614C99CBA184}"/>
+              </a:ext>
+            </a:extLst>
+          </p:cNvPr>
+          <p:cNvSpPr>
+            <a:spLocks noGrp="1"/>
+          </p:cNvSpPr>
+          <p:nvPr>
+            <p:ph idx="1"/>
+          </p:nvPr>
+        </p:nvSpPr>
+        <p:spPr>
+          <a:xfrm>
+            <a:off x="233172" y="960120"/>
+            <a:ext cx="8778240" cy="454198"/>
+          </a:xfrm>
+        </p:spPr>
+        <p:txBody>
+          <a:bodyPr>
+            <a:normAutofit/>
+          </a:bodyPr>
+          <a:lstStyle/>
+          <a:p>
+            <a:pPr marL="0" indent="0">
+              <a:spcBef>
+                <a:spcPts val="300"/>
+              </a:spcBef>
+              <a:spcAft>
+                <a:spcPts val="300"/>
+              </a:spcAft>
+              <a:buNone/>
+            </a:pPr>
+            <a:r>
+              <a:rPr sz="1400" b="0">
+                <a:solidFill>
+                  <a:srgbClr val="000000"/>
+                </a:solidFill>
+                <a:latin typeface="맑은 고딕"/>
+                <a:ea typeface="맑은 고딕"/>
+              </a:rPr>
+              <a:t>통합에서 발견한 것은 </a:t>
+            </a:r>
+            <a:r>
+              <a:rPr sz="1400" b="1">
+                <a:solidFill>
+                  <a:srgbClr val="000000"/>
+                </a:solidFill>
+                <a:latin typeface="맑은 고딕"/>
+                <a:ea typeface="맑은 고딕"/>
+              </a:rPr>
+              <a:t>후속 작업에 영향을 미치는 경우에만</a:t>
+            </a:r>
+            <a:r>
+              <a:rPr sz="1400" b="0">
+                <a:solidFill>
+                  <a:srgbClr val="000000"/>
+                </a:solidFill>
+                <a:latin typeface="맑은 고딕"/>
+                <a:ea typeface="맑은 고딕"/>
+              </a:rPr>
+              <a:t> 이전 산출물에 반영한다.</a:t>
+            </a:r>
+          </a:p>
+        </p:txBody>
+      </p:sp>
+      <p:sp>
+        <p:nvSpPr>
+          <p:cNvPr id="10" name="내용 개체 틀 7">
+            <a:extLst>
+              <a:ext uri="{FF2B5EF4-FFF2-40B4-BE49-F238E27FC236}">
+                <a16:creationId xmlns:a16="http://schemas.microsoft.com/office/drawing/2014/main" id="{BEBA2C4A-B0BF-F2E4-EA6E-614C99CBA184}"/>
+              </a:ext>
+            </a:extLst>
+          </p:cNvPr>
+          <p:cNvSpPr>
+            <a:spLocks noGrp="1"/>
+          </p:cNvSpPr>
+          <p:nvPr>
+            <p:ph idx="1"/>
+          </p:nvPr>
+        </p:nvSpPr>
+        <p:spPr>
+          <a:xfrm>
+            <a:off x="4572000" y="1414318"/>
+            <a:ext cx="4439412" cy="4898147"/>
+          </a:xfrm>
+        </p:spPr>
+        <p:txBody>
+          <a:bodyPr>
+            <a:normAutofit/>
+          </a:bodyPr>
+          <a:lstStyle/>
+          <a:p>
+            <a:pPr lvl="2" marL="228600" indent="-182880">
+              <a:spcBef>
+                <a:spcPts val="300"/>
+              </a:spcBef>
+              <a:spcAft>
+                <a:spcPts val="300"/>
               </a:spcAft>
               <a:buSzPct val="90000"/>
               <a:buFont typeface="Wingdings" pitchFamily="2" charset="2"/>
               <a:buChar char=""/>
             </a:pPr>
             <a:r>
-              <a:rPr sz="1800" b="1">
-                <a:solidFill>
-                  <a:srgbClr val="000000"/>
-                </a:solidFill>
-                <a:latin typeface="맑은 고딕"/>
-                <a:ea typeface="맑은 고딕"/>
-              </a:rPr>
-              <a:t>빈틈</a:t>
-            </a:r>
-            <a:r>
-              <a:rPr sz="1800" b="0">
-                <a:solidFill>
-                  <a:srgbClr val="000000"/>
-                </a:solidFill>
-                <a:latin typeface="맑은 고딕"/>
-                <a:ea typeface="맑은 고딕"/>
-              </a:rPr>
-              <a:t> —</a:t>
-            </a:r>
-            <a:r>
-              <a:rPr sz="1600" b="0">
-                <a:solidFill>
-                  <a:srgbClr val="000000"/>
-                </a:solidFill>
-                <a:latin typeface="맑은 고딕"/>
-                <a:ea typeface="맑은 고딕"/>
-              </a:rPr>
-              <a:t> 모델마다 맞아도 조립하면 깨질 수 있다. 결제·배송 연결과 고른 대행사를 저장해 보완했다</a:t>
-            </a:r>
-          </a:p>
-          <a:p>
-            <a:pPr lvl="2" marL="723900" indent="-368300">
+              <a:rPr sz="1400" b="1">
+                <a:solidFill>
+                  <a:srgbClr val="000000"/>
+                </a:solidFill>
+                <a:latin typeface="맑은 고딕"/>
+                <a:ea typeface="맑은 고딕"/>
+              </a:rPr>
+              <a:t>용어집</a:t>
+            </a:r>
+            <a:r>
+              <a:rPr sz="1000" b="0">
+                <a:solidFill>
+                  <a:srgbClr val="000000"/>
+                </a:solidFill>
+                <a:latin typeface="맑은 고딕"/>
+                <a:ea typeface="맑은 고딕"/>
+              </a:rPr>
+              <a:t>(실습 2)</a:t>
+            </a:r>
+          </a:p>
+          <a:p>
+            <a:pPr lvl="3" marL="457200" indent="-182880">
               <a:spcBef>
-                <a:spcPts val="600"/>
+                <a:spcPts val="300"/>
               </a:spcBef>
               <a:spcAft>
-                <a:spcPts val="600"/>
+                <a:spcPts val="300"/>
+              </a:spcAft>
+              <a:buSzPct val="90000"/>
+              <a:buFont typeface="Wingdings" pitchFamily="2" charset="2"/>
+              <a:buChar char=""/>
+            </a:pPr>
+            <a:r>
+              <a:rPr sz="1200" b="1">
+                <a:solidFill>
+                  <a:srgbClr val="000000"/>
+                </a:solidFill>
+                <a:latin typeface="맑은 고딕"/>
+                <a:ea typeface="맑은 고딕"/>
+              </a:rPr>
+              <a:t>새 용어</a:t>
+            </a:r>
+            <a:r>
+              <a:rPr sz="1200" b="0">
+                <a:solidFill>
+                  <a:srgbClr val="000000"/>
+                </a:solidFill>
+                <a:latin typeface="맑은 고딕"/>
+                <a:ea typeface="맑은 고딕"/>
+              </a:rPr>
+              <a:t> —</a:t>
+            </a:r>
+            <a:r>
+              <a:rPr sz="1000" b="0">
+                <a:solidFill>
+                  <a:srgbClr val="000000"/>
+                </a:solidFill>
+                <a:latin typeface="맑은 고딕"/>
+                <a:ea typeface="맑은 고딕"/>
+              </a:rPr>
+              <a:t> 회차 상태의 다섯 값</a:t>
+            </a:r>
+            <a:r>
+              <a:rPr sz="800" b="0">
+                <a:solidFill>
+                  <a:srgbClr val="000000"/>
+                </a:solidFill>
+                <a:latin typeface="맑은 고딕"/>
+                <a:ea typeface="맑은 고딕"/>
+              </a:rPr>
+              <a:t>(예정·청구됨·배송됨·환불 대기·취소됨)</a:t>
+            </a:r>
+          </a:p>
+          <a:p>
+            <a:pPr lvl="2" marL="228600" indent="-182880">
+              <a:spcBef>
+                <a:spcPts val="300"/>
+              </a:spcBef>
+              <a:spcAft>
+                <a:spcPts val="300"/>
               </a:spcAft>
               <a:buSzPct val="90000"/>
               <a:buFont typeface="Wingdings" pitchFamily="2" charset="2"/>
               <a:buChar char=""/>
             </a:pPr>
             <a:r>
-              <a:rPr sz="1800" b="1">
-                <a:solidFill>
-                  <a:srgbClr val="000000"/>
-                </a:solidFill>
-                <a:latin typeface="맑은 고딕"/>
-                <a:ea typeface="맑은 고딕"/>
-              </a:rPr>
-              <a:t>위험 주도</a:t>
-            </a:r>
-            <a:r>
-              <a:rPr sz="1800" b="0">
-                <a:solidFill>
-                  <a:srgbClr val="000000"/>
-                </a:solidFill>
-                <a:latin typeface="맑은 고딕"/>
-                <a:ea typeface="맑은 고딕"/>
-              </a:rPr>
-              <a:t> —</a:t>
-            </a:r>
-            <a:r>
-              <a:rPr sz="1600" b="0">
-                <a:solidFill>
-                  <a:srgbClr val="000000"/>
-                </a:solidFill>
-                <a:latin typeface="맑은 고딕"/>
-                <a:ea typeface="맑은 고딕"/>
-              </a:rPr>
-              <a:t> 위험을 찾고, 기법을 고르고, 줄었는지 평가한다</a:t>
-            </a:r>
-          </a:p>
-          <a:p>
-            <a:pPr lvl="2" marL="723900" indent="-368300">
+              <a:rPr sz="1400" b="1">
+                <a:solidFill>
+                  <a:srgbClr val="000000"/>
+                </a:solidFill>
+                <a:latin typeface="맑은 고딕"/>
+                <a:ea typeface="맑은 고딕"/>
+              </a:rPr>
+              <a:t>※ 현행화 기준</a:t>
+            </a:r>
+          </a:p>
+          <a:p>
+            <a:pPr lvl="3" marL="457200" indent="-182880">
               <a:spcBef>
-                <a:spcPts val="600"/>
+                <a:spcPts val="300"/>
               </a:spcBef>
               <a:spcAft>
-                <a:spcPts val="600"/>
+                <a:spcPts val="300"/>
               </a:spcAft>
               <a:buSzPct val="90000"/>
               <a:buFont typeface="Wingdings" pitchFamily="2" charset="2"/>
-              <a:buChar char=""/>
+              <a:buChar char=""/>
             </a:pPr>
             <a:r>
-              <a:rPr sz="1800" b="1">
-                <a:solidFill>
-                  <a:srgbClr val="000000"/>
-                </a:solidFill>
-                <a:latin typeface="맑은 고딕"/>
-                <a:ea typeface="맑은 고딕"/>
-              </a:rPr>
-              <a:t>비용</a:t>
-            </a:r>
-            <a:r>
-              <a:rPr sz="1800" b="0">
+              <a:rPr sz="1200" b="1">
+                <a:solidFill>
+                  <a:srgbClr val="000000"/>
+                </a:solidFill>
+                <a:latin typeface="맑은 고딕"/>
+                <a:ea typeface="맑은 고딕"/>
+              </a:rPr>
+              <a:t>반영</a:t>
+            </a:r>
+            <a:r>
+              <a:rPr sz="1200" b="0">
                 <a:solidFill>
                   <a:srgbClr val="000000"/>
                 </a:solidFill>
@@ -20938,40 +20955,40 @@
               <a:t> —</a:t>
             </a:r>
             <a:r>
-              <a:rPr sz="1600" b="0">
-                <a:solidFill>
-                  <a:srgbClr val="000000"/>
-                </a:solidFill>
-                <a:latin typeface="맑은 고딕"/>
-                <a:ea typeface="맑은 고딕"/>
-              </a:rPr>
-              <a:t> 남긴 모델은 유지해야 한다. 코드에 없는 정보만 남긴다</a:t>
-            </a:r>
-          </a:p>
-          <a:p>
-            <a:pPr lvl="2" marL="723900" indent="-368300">
+              <a:rPr sz="1000" b="0">
+                <a:solidFill>
+                  <a:srgbClr val="000000"/>
+                </a:solidFill>
+                <a:latin typeface="맑은 고딕"/>
+                <a:ea typeface="맑은 고딕"/>
+              </a:rPr>
+              <a:t> 유스케이스, 상태 기계, 용어집. 구현·검증의 입력이 된다.</a:t>
+            </a:r>
+          </a:p>
+          <a:p>
+            <a:pPr lvl="3" marL="457200" indent="-182880">
               <a:spcBef>
-                <a:spcPts val="600"/>
+                <a:spcPts val="300"/>
               </a:spcBef>
               <a:spcAft>
-                <a:spcPts val="600"/>
+                <a:spcPts val="300"/>
               </a:spcAft>
               <a:buSzPct val="90000"/>
               <a:buFont typeface="Wingdings" pitchFamily="2" charset="2"/>
-              <a:buChar char=""/>
+              <a:buChar char=""/>
             </a:pPr>
             <a:r>
-              <a:rPr sz="1800" b="1">
-                <a:solidFill>
-                  <a:srgbClr val="000000"/>
-                </a:solidFill>
-                <a:latin typeface="맑은 고딕"/>
-                <a:ea typeface="맑은 고딕"/>
-              </a:rPr>
-              <a:t>잘못된 관행</a:t>
-            </a:r>
-            <a:r>
-              <a:rPr sz="1800" b="0">
+              <a:rPr sz="1200" b="1">
+                <a:solidFill>
+                  <a:srgbClr val="000000"/>
+                </a:solidFill>
+                <a:latin typeface="맑은 고딕"/>
+                <a:ea typeface="맑은 고딕"/>
+              </a:rPr>
+              <a:t>기록만</a:t>
+            </a:r>
+            <a:r>
+              <a:rPr sz="1200" b="0">
                 <a:solidFill>
                   <a:srgbClr val="000000"/>
                 </a:solidFill>
@@ -20981,88 +20998,14 @@
               <a:t> —</a:t>
             </a:r>
             <a:r>
-              <a:rPr sz="1600" b="0">
-                <a:solidFill>
-                  <a:srgbClr val="000000"/>
-                </a:solidFill>
-                <a:latin typeface="맑은 고딕"/>
-                <a:ea typeface="맑은 고딕"/>
-              </a:rPr>
-              <a:t> 분석 마비, 문서를 위한 모델, 위험 앞의 생략, 조립 없는 완료</a:t>
-            </a:r>
-          </a:p>
-          <a:p>
-            <a:pPr marL="342900" indent="0">
-              <a:spcBef>
-                <a:spcPts val="600"/>
-              </a:spcBef>
-              <a:spcAft>
-                <a:spcPts val="600"/>
-              </a:spcAft>
-              <a:buNone/>
-            </a:pPr>
-            <a:r>
-              <a:rPr sz="1800" b="1">
-                <a:solidFill>
-                  <a:srgbClr val="000000"/>
-                </a:solidFill>
-                <a:latin typeface="맑은 고딕"/>
-                <a:ea typeface="맑은 고딕"/>
-              </a:rPr>
-              <a:t>다음 세션</a:t>
-            </a:r>
-          </a:p>
-          <a:p>
-            <a:pPr lvl="2" marL="723900" indent="-368300">
-              <a:spcBef>
-                <a:spcPts val="600"/>
-              </a:spcBef>
-              <a:spcAft>
-                <a:spcPts val="600"/>
-              </a:spcAft>
-              <a:buSzPct val="90000"/>
-              <a:buFont typeface="Wingdings" pitchFamily="2" charset="2"/>
-              <a:buChar char=""/>
-            </a:pPr>
-            <a:r>
-              <a:rPr sz="1800" b="0">
-                <a:solidFill>
-                  <a:srgbClr val="000000"/>
-                </a:solidFill>
-                <a:latin typeface="맑은 고딕"/>
-                <a:ea typeface="맑은 고딕"/>
-              </a:rPr>
-              <a:t>"</a:t>
-            </a:r>
-            <a:r>
-              <a:rPr sz="1800" b="1">
-                <a:solidFill>
-                  <a:srgbClr val="000000"/>
-                </a:solidFill>
-                <a:latin typeface="맑은 고딕"/>
-                <a:ea typeface="맑은 고딕"/>
-              </a:rPr>
-              <a:t>12. 구현·검증·DevOps와 SW공학 피드백</a:t>
-            </a:r>
-            <a:r>
-              <a:rPr sz="1800" b="0">
-                <a:solidFill>
-                  <a:srgbClr val="000000"/>
-                </a:solidFill>
-                <a:latin typeface="맑은 고딕"/>
-                <a:ea typeface="맑은 고딕"/>
-              </a:rPr>
-              <a:t>" —</a:t>
-            </a:r>
-            <a:r>
-              <a:rPr sz="1600" b="0">
-                <a:solidFill>
-                  <a:srgbClr val="000000"/>
-                </a:solidFill>
-                <a:latin typeface="맑은 고딕"/>
-                <a:ea typeface="맑은 고딕"/>
-              </a:rPr>
-              <a:t> 구현·배포의 evidence로 다시 열 상위 판단을 진단한다.</a:t>
+              <a:rPr sz="1000" b="0">
+                <a:solidFill>
+                  <a:srgbClr val="000000"/>
+                </a:solidFill>
+                <a:latin typeface="맑은 고딕"/>
+                <a:ea typeface="맑은 고딕"/>
+              </a:rPr>
+              <a:t> 영수증을 그리지 않은 이유.</a:t>
             </a:r>
           </a:p>
         </p:txBody>
@@ -23668,8 +23611,8 @@
           </p:nvPr>
         </p:nvGraphicFramePr>
         <p:xfrm>
-          <a:off x="1538796" y="1842998"/>
-          <a:ext cx="6052820" cy="3873500"/>
+          <a:off x="1496886" y="1842998"/>
+          <a:ext cx="6136640" cy="3873500"/>
         </p:xfrm>
         <a:graphic>
           <a:graphicData uri="http://schemas.openxmlformats.org/drawingml/2006/table">
@@ -23677,7 +23620,7 @@
               <a:tblPr/>
               <a:tblGrid>
                 <a:gridCol w="889000"/>
-                <a:gridCol w="3350260"/>
+                <a:gridCol w="3434080"/>
                 <a:gridCol w="1813560"/>
               </a:tblGrid>
               <a:tr h="288000">
@@ -23957,7 +23900,7 @@
                           <a:ea typeface="맑은 고딕" panose="020B0503020000020004" pitchFamily="34" charset="-127"/>
                           <a:cs typeface="맑은 고딕"/>
                         </a:rPr>
-                        <a:t>누가 언제 취소할 수 있는가</a:t>
+                        <a:t>누가 언제 취소할 수 있는가?</a:t>
                       </a:r>
                     </a:p>
                   </a:txBody>
@@ -24125,7 +24068,7 @@
                           <a:ea typeface="맑은 고딕" panose="020B0503020000020004" pitchFamily="34" charset="-127"/>
                           <a:cs typeface="맑은 고딕"/>
                         </a:rPr>
-                        <a:t>취소된 주문에 무엇이 남는가</a:t>
+                        <a:t>취소된 주문에 무엇이 남는가?</a:t>
                       </a:r>
                     </a:p>
                   </a:txBody>
@@ -24293,7 +24236,7 @@
                           <a:ea typeface="맑은 고딕" panose="020B0503020000020004" pitchFamily="34" charset="-127"/>
                           <a:cs typeface="맑은 고딕"/>
                         </a:rPr>
-                        <a:t>환불이 늦으면 O-1은 어느 상태인가</a:t>
+                        <a:t>환불이 늦으면 O-1은 어느 상태인가?</a:t>
                       </a:r>
                     </a:p>
                   </a:txBody>
@@ -24461,7 +24404,7 @@
                           <a:ea typeface="맑은 고딕" panose="020B0503020000020004" pitchFamily="34" charset="-127"/>
                           <a:cs typeface="맑은 고딕"/>
                         </a:rPr>
-                        <a:t>결제 시스템이 바뀌면 어디가 바뀌는가</a:t>
+                        <a:t>결제 시스템이 바뀌면 어디가 바뀌는가?</a:t>
                       </a:r>
                     </a:p>
                   </a:txBody>
@@ -24629,7 +24572,7 @@
                           <a:ea typeface="맑은 고딕" panose="020B0503020000020004" pitchFamily="34" charset="-127"/>
                           <a:cs typeface="맑은 고딕"/>
                         </a:rPr>
-                        <a:t>누가 취소 규칙을 아는가</a:t>
+                        <a:t>누가 취소 규칙을 아는가?</a:t>
                       </a:r>
                     </a:p>
                   </a:txBody>
@@ -24797,7 +24740,7 @@
                           <a:ea typeface="맑은 고딕" panose="020B0503020000020004" pitchFamily="34" charset="-127"/>
                           <a:cs typeface="맑은 고딕"/>
                         </a:rPr>
-                        <a:t>당일 배송 O-1은 누구에게 중단을 요청하는가</a:t>
+                        <a:t>당일 배송 O-1은 누구에게 중단을 요청하는가?</a:t>
                       </a:r>
                     </a:p>
                   </a:txBody>
@@ -24965,7 +24908,7 @@
                           <a:ea typeface="맑은 고딕" panose="020B0503020000020004" pitchFamily="34" charset="-127"/>
                           <a:cs typeface="맑은 고딕"/>
                         </a:rPr>
-                        <a:t>저장했다가 읽은 O-1의 상태가 같은가</a:t>
+                        <a:t>저장했다가 읽은 O-1의 상태가 같은가?</a:t>
                       </a:r>
                     </a:p>
                   </a:txBody>

--- a/courses/ooad/sessions/s11.pptx
+++ b/courses/ooad/sessions/s11.pptx
@@ -564,7 +564,7 @@
             <a:pPr lvl="0"/>
             <a:r>
               <a:rPr lang="ko-KR" sz="1200"/>
-              <a:t>결제 금액은 확정 값이다. 주문 총액으로 다시 계산하지 않는다 — 결제된 금액이 환불 금액의 기준이다("10. 기술 제약과 도메인 의미 보존"의 확정 값 규칙).</a:t>
+              <a:t>결제 금액은 확정 값이다. 주문 총액으로 다시 계산하지 않는다 — 결제된 금액이 환불 금액의 기준이다("세션 10. 기술 제약과 도메인 의미 보존"의 확정 값 규칙).</a:t>
             </a:r>
           </a:p>
           <a:p>
@@ -700,7 +700,7 @@
             <a:pPr lvl="0"/>
             <a:r>
               <a:rPr lang="ko-KR" sz="1200"/>
-              <a:t>요청 순서(출고 중단 → 환불)는 "07. 책임·협력·계약"의 사후조건이다. 통합 테스트가 계약을 조립된 상태에서 다시 확인한다.</a:t>
+              <a:t>요청 순서(출고 중단 → 환불)는 "세션 07. 책임·협력·계약"의 사후조건이다. 통합 테스트가 계약을 조립된 상태에서 다시 확인한다.</a:t>
             </a:r>
           </a:p>
           <a:p>
@@ -714,7 +714,7 @@
             <a:pPr lvl="0"/>
             <a:r>
               <a:rPr lang="ko-KR" sz="1200"/>
-              <a:t>가짜 외부 시스템은 테스트 더블이다. 실제 외부와의 계약 확인은 "12. 구현·검증·DevOps와 SW공학 피드백"에서 다룬다.</a:t>
+              <a:t>가짜 외부 시스템은 테스트 더블이다. 실제 외부와의 계약 확인은 "세션 12. 구현·검증·DevOps와 SW공학 피드백"에서 다룬다.</a:t>
             </a:r>
           </a:p>
         </p:txBody>
@@ -1054,7 +1054,7 @@
             <a:pPr lvl="0"/>
             <a:r>
               <a:rPr lang="ko-KR" sz="1200"/>
-              <a:t>"09. 설계 대안 평가"의 추상화 비용과 같은 판단이다. 이 표는 그 판단을 통합된 설계 전체에 적용한다.</a:t>
+              <a:t>"세션 09. 설계 대안 평가"의 추상화 비용과 같은 판단이다. 이 표는 그 판단을 통합된 설계 전체에 적용한다.</a:t>
             </a:r>
           </a:p>
           <a:p>
@@ -1258,7 +1258,7 @@
             <a:pPr lvl="0"/>
             <a:r>
               <a:rPr lang="ko-KR" sz="1200"/>
-              <a:t>입력은 "02. 요구 분석과 유스케이스"부터 "10. 기술 제약과 도메인 의미 보존"까지의 산출물 전체다. 새 모델 기법은 없다. 이미 만든 모델을 잇고 평가한다.</a:t>
+              <a:t>입력은 "세션 02. 요구 분석과 유스케이스"부터 "세션 10. 기술 제약과 도메인 의미 보존"까지의 산출물 전체다. 새 모델 기법은 없다. 이미 만든 모델을 잇고 평가한다.</a:t>
             </a:r>
           </a:p>
           <a:p>
@@ -1401,7 +1401,7 @@
             <a:pPr lvl="0"/>
             <a:r>
               <a:rPr lang="ko-KR" sz="1200"/>
-              <a:t>LLM으로 코드를 빠르게 만들 수 있을수록 이 관행이 늘기 쉽다. 코드가 빨리 나와도 상태 경계의 판단은 사람이 확인해야 한다("14. AI-native SW공학"과 연결).</a:t>
+              <a:t>LLM으로 코드를 빠르게 만들 수 있을수록 이 관행이 늘기 쉽다. 코드가 빨리 나와도 상태 경계의 판단은 사람이 확인해야 한다("세션 14. AI-native SW공학"과 연결).</a:t>
             </a:r>
           </a:p>
         </p:txBody>
@@ -1469,7 +1469,7 @@
             <a:pPr lvl="0"/>
             <a:r>
               <a:rPr lang="ko-KR" sz="1200"/>
-              <a:t>통합 테스트를 CI에 두는 방법은 "12. 구현·검증·DevOps와 SW공학 피드백"에서 다룬다.</a:t>
+              <a:t>통합 테스트를 CI에 두는 방법은 "세션 12. 구현·검증·DevOps와 SW공학 피드백"에서 다룬다.</a:t>
             </a:r>
           </a:p>
         </p:txBody>
@@ -1877,7 +1877,7 @@
             <a:pPr lvl="0"/>
             <a:r>
               <a:rPr lang="ko-KR" sz="1200"/>
-              <a:t>"03. 정적 모델 — 도메인 개념과 관계"와 "04. 동적 모델 — 상호작용과 상태"에서 "충분한 만큼"을 물었다. 이 세션이 그 기준을 정리한다.</a:t>
+              <a:t>"세션 03. 정적 모델 — 도메인 개념과 관계"와 "세션 04. 동적 모델 — 상호작용과 상태"에서 "충분한 만큼"을 물었다. 이 세션이 그 기준을 정리한다.</a:t>
             </a:r>
           </a:p>
         </p:txBody>
@@ -1945,7 +1945,7 @@
             <a:pPr lvl="0"/>
             <a:r>
               <a:rPr lang="ko-KR" sz="1200"/>
-              <a:t>이 표는 추적표다. 요구 → 설계 → 코드의 추적은 문서를 위한 것이 아니라, 요구가 바뀔 때 어디를 다시 열지 찾기 위한 것이다("12. 구현·검증·DevOps와 SW공학 피드백"의 역추적과 연결).</a:t>
+              <a:t>이 표는 추적표다. 요구 → 설계 → 코드의 추적은 문서를 위한 것이 아니라, 요구가 바뀔 때 어디를 다시 열지 찾기 위한 것이다("세션 12. 구현·검증·DevOps와 SW공학 피드백"의 역추적과 연결).</a:t>
             </a:r>
           </a:p>
           <a:p>
@@ -2013,14 +2013,14 @@
             <a:pPr lvl="0"/>
             <a:r>
               <a:rPr lang="ko-KR" sz="1200"/>
-              <a:t>동적 모델의 질문이 취소 처리 중을 발견했다("04. 동적 모델 — 상호작용과 상태"). 모델이 새 상태를 찾아낸 것 — 모델의 가치가 가장 분명한 예다.</a:t>
+              <a:t>동적 모델의 질문이 취소 처리 중을 발견했다("세션 04. 동적 모델 — 상호작용과 상태"). 모델이 새 상태를 찾아낸 것 — 모델의 가치가 가장 분명한 예다.</a:t>
             </a:r>
           </a:p>
           <a:p>
             <a:pPr lvl="0"/>
             <a:r>
               <a:rPr lang="ko-KR" sz="1200"/>
-              <a:t>evidence의 종류는 "01. OOAD 개요"의 결정과 검증을 따른다. 각 모델이 결정을 만들고, 그 결정은 다음 모델이나 테스트가 검증한다.</a:t>
+              <a:t>evidence의 종류는 "세션 01. OOAD 개요"의 결정과 검증을 따른다. 각 모델이 결정을 만들고, 그 결정은 다음 모델이나 테스트가 검증한다.</a:t>
             </a:r>
           </a:p>
         </p:txBody>
@@ -2095,7 +2095,7 @@
             <a:pPr lvl="0"/>
             <a:r>
               <a:rPr lang="ko-KR" sz="1200"/>
-              <a:t>화살표가 모두 안쪽을 향한다는 것이 "05. 구조적 경계와 의존성"의 의존 규칙이 통합 뒤에도 지켜졌다는 evidence다. 패키지 사이의 순환이 없는지는 테스트로도 확인할 수 있다.</a:t>
+              <a:t>화살표가 모두 안쪽을 향한다는 것이 "세션 05. 구조적 경계와 의존성"의 의존 규칙이 통합 뒤에도 지켜졌다는 evidence다. 패키지 사이의 순환이 없는지는 테스트로도 확인할 수 있다.</a:t>
             </a:r>
           </a:p>
         </p:txBody>
@@ -2156,14 +2156,14 @@
             <a:pPr lvl="0"/>
             <a:r>
               <a:rPr lang="ko-KR" sz="1200"/>
-              <a:t>계약("07. 책임·협력·계약") — 사전조건은 O-1이 결제 완료이고 출고 중단이 수락되는 것, 사후조건은 O-1이 취소 처리 중이고 출고 중단과 환불을 이 순서로 요청한 것이다.</a:t>
+              <a:t>계약("세션 07. 책임·협력·계약") — 사전조건은 O-1이 결제 완료이고 출고 중단이 수락되는 것, 사후조건은 O-1이 취소 처리 중이고 출고 중단과 환불을 이 순서로 요청한 것이다.</a:t>
             </a:r>
           </a:p>
           <a:p>
             <a:pPr lvl="0"/>
             <a:r>
               <a:rPr lang="ko-KR" sz="1200"/>
-              <a:t>이 시퀀스는 "06. 분석 모델에서 설계 모델로"의 설계 시퀀스에 저장소가 실제로 끼어든 것이다. 앞 세션에서는 저장소가 메모리에 주문을 들고 있었다.</a:t>
+              <a:t>이 시퀀스는 "세션 06. 분석 모델에서 설계 모델로"의 설계 시퀀스에 저장소가 실제로 끼어든 것이다. 앞 세션에서는 저장소가 메모리에 주문을 들고 있었다.</a:t>
             </a:r>
           </a:p>
           <a:p>
@@ -2231,7 +2231,7 @@
             <a:pPr lvl="0"/>
             <a:r>
               <a:rPr lang="ko-KR" sz="1200"/>
-              <a:t>"10. 기술 제약과 도메인 의미 보존"은 결제·배송의 연결을 교육용 범위에서 뺐다고 적었다. 범위를 좁힌 결정 자체는 틀리지 않았다. 그 결정이 다른 판단에 미치는 영향을 통합에서 확인하지 않으면 빈틈이 된다.</a:t>
+              <a:t>"세션 10. 기술 제약과 도메인 의미 보존"은 결제·배송의 연결을 교육용 범위에서 뺐다고 적었다. 범위를 좁힌 결정 자체는 틀리지 않았다. 그 결정이 다른 판단에 미치는 영향을 통합에서 확인하지 않으면 빈틈이 된다.</a:t>
             </a:r>
           </a:p>
           <a:p>
@@ -2245,7 +2245,7 @@
             <a:pPr lvl="0"/>
             <a:r>
               <a:rPr lang="ko-KR" sz="1200"/>
-              <a:t>이런 빈틈은 흔히 통합 테스트나 운영에서 처음 보인다. 발견 위치와 원인 수준이 다르다는 것은 "12. 구현·검증·DevOps와 SW공학 피드백"의 주제다.</a:t>
+              <a:t>이런 빈틈은 흔히 통합 테스트나 운영에서 처음 보인다. 발견 위치와 원인 수준이 다르다는 것은 "세션 12. 구현·검증·DevOps와 SW공학 피드백"의 주제다.</a:t>
             </a:r>
           </a:p>
         </p:txBody>
@@ -2306,7 +2306,7 @@
             <a:pPr lvl="0"/>
             <a:r>
               <a:rPr lang="ko-KR" sz="1200"/>
-              <a:t>"09. 설계 대안 평가"의 결정 기록은 "배송마다 대행사를 고른다"였다. 고른 결과를 언제까지 유지하는가는 묻지 않았다. 보완은 결정 기록에 한 줄을 더한다 — "고른 대행사는 배송의 사실로 저장하고, 규칙이 바뀌어도 다시 고르지 않는다".</a:t>
+              <a:t>"세션 09. 설계 대안 평가"의 결정 기록은 "배송마다 대행사를 고른다"였다. 고른 결과를 언제까지 유지하는가는 묻지 않았다. 보완은 결정 기록에 한 줄을 더한다 — "고른 대행사는 배송의 사실로 저장하고, 규칙이 바뀌어도 다시 고르지 않는다".</a:t>
             </a:r>
           </a:p>
           <a:p>
@@ -5556,7 +5556,7 @@
         </p:nvSpPr>
         <p:spPr>
           <a:xfrm>
-            <a:off x="365760" y="4880671"/>
+            <a:off x="365760" y="5007671"/>
             <a:ext cx="8412480" cy="781278"/>
           </a:xfrm>
           <a:prstGeom prst="rect">
@@ -5827,7 +5827,7 @@
           </p:nvPr>
         </p:nvGraphicFramePr>
         <p:xfrm>
-          <a:off x="2403666" y="3058085"/>
+          <a:off x="2403666" y="2874818"/>
           <a:ext cx="4323080" cy="3873500"/>
         </p:xfrm>
         <a:graphic>
@@ -6327,7 +6327,7 @@
         <p:spPr>
           <a:xfrm>
             <a:off x="365760" y="960120"/>
-            <a:ext cx="8412480" cy="1996365"/>
+            <a:ext cx="8412480" cy="1844479"/>
           </a:xfrm>
           <a:prstGeom prst="rect">
             <a:avLst/>
@@ -6819,7 +6819,7 @@
           </p:nvPr>
         </p:nvGraphicFramePr>
         <p:xfrm>
-          <a:off x="1998536" y="2100036"/>
+          <a:off x="1998536" y="2087880"/>
           <a:ext cx="5133340" cy="3873500"/>
         </p:xfrm>
         <a:graphic>
@@ -8196,7 +8196,7 @@
         </p:nvSpPr>
         <p:spPr>
           <a:xfrm>
-            <a:off x="365760" y="4217636"/>
+            <a:off x="365760" y="4332480"/>
             <a:ext cx="8412480" cy="781278"/>
           </a:xfrm>
           <a:prstGeom prst="rect">
@@ -8433,7 +8433,7 @@
           </p:nvPr>
         </p:nvGraphicFramePr>
         <p:xfrm>
-          <a:off x="1902016" y="2649162"/>
+          <a:off x="1902016" y="2438400"/>
           <a:ext cx="5326380" cy="3873500"/>
         </p:xfrm>
         <a:graphic>
@@ -9172,7 +9172,7 @@
         <p:spPr>
           <a:xfrm>
             <a:off x="365760" y="960120"/>
-            <a:ext cx="8412480" cy="1587442"/>
+            <a:ext cx="8412480" cy="1435556"/>
           </a:xfrm>
           <a:prstGeom prst="rect">
             <a:avLst/>
@@ -9409,7 +9409,7 @@
         </p:nvSpPr>
         <p:spPr>
           <a:xfrm>
-            <a:off x="365760" y="3902762"/>
+            <a:off x="365760" y="3819000"/>
             <a:ext cx="8412480" cy="781278"/>
           </a:xfrm>
           <a:prstGeom prst="rect">
@@ -9636,7 +9636,7 @@
           </p:nvPr>
         </p:nvGraphicFramePr>
         <p:xfrm>
-          <a:off x="2055686" y="2649162"/>
+          <a:off x="2055686" y="2600498"/>
           <a:ext cx="5019040" cy="3873500"/>
         </p:xfrm>
         <a:graphic>
@@ -11143,7 +11143,7 @@
           </p:nvPr>
         </p:nvGraphicFramePr>
         <p:xfrm>
-          <a:off x="1510856" y="2100036"/>
+          <a:off x="1510856" y="2087880"/>
           <a:ext cx="6108700" cy="3873500"/>
         </p:xfrm>
         <a:graphic>
@@ -12489,7 +12489,7 @@
         </p:nvSpPr>
         <p:spPr>
           <a:xfrm>
-            <a:off x="365760" y="3641636"/>
+            <a:off x="365760" y="3756480"/>
             <a:ext cx="8412480" cy="781278"/>
           </a:xfrm>
           <a:prstGeom prst="rect">
@@ -12736,7 +12736,7 @@
           </p:nvPr>
         </p:nvGraphicFramePr>
         <p:xfrm>
-          <a:off x="1997266" y="1842998"/>
+          <a:off x="1997266" y="1813560"/>
           <a:ext cx="5135880" cy="3873500"/>
         </p:xfrm>
         <a:graphic>
@@ -13482,7 +13482,7 @@
         </p:nvSpPr>
         <p:spPr>
           <a:xfrm>
-            <a:off x="365760" y="3384598"/>
+            <a:off x="365760" y="3482160"/>
             <a:ext cx="8412480" cy="781278"/>
           </a:xfrm>
           <a:prstGeom prst="rect">
@@ -14022,7 +14022,7 @@
                 <a:latin typeface="맑은 고딕"/>
                 <a:ea typeface="맑은 고딕"/>
               </a:rPr>
-              <a:t>("08. 변화 대응과 변이 설계")</a:t>
+              <a:t>("세션 08. 변화 대응과 변이 설계")</a:t>
             </a:r>
             <a:r>
               <a:rPr sz="1600" b="0">
@@ -17397,7 +17397,7 @@
           </p:nvPr>
         </p:nvGraphicFramePr>
         <p:xfrm>
-          <a:off x="1664526" y="1842998"/>
+          <a:off x="1664526" y="1813560"/>
           <a:ext cx="5801360" cy="3873500"/>
         </p:xfrm>
         <a:graphic>
@@ -18774,7 +18774,7 @@
         </p:nvSpPr>
         <p:spPr>
           <a:xfrm>
-            <a:off x="365760" y="3960598"/>
+            <a:off x="365760" y="4058160"/>
             <a:ext cx="8412480" cy="1038316"/>
           </a:xfrm>
           <a:prstGeom prst="rect">
@@ -19043,7 +19043,7 @@
           </p:nvPr>
         </p:nvGraphicFramePr>
         <p:xfrm>
-          <a:off x="2138235" y="1842998"/>
+          <a:off x="2138235" y="1813560"/>
           <a:ext cx="4853940" cy="3873500"/>
         </p:xfrm>
         <a:graphic>
@@ -20272,7 +20272,7 @@
         </p:nvSpPr>
         <p:spPr>
           <a:xfrm>
-            <a:off x="365760" y="3672598"/>
+            <a:off x="365760" y="3770160"/>
             <a:ext cx="8412480" cy="781278"/>
           </a:xfrm>
           <a:prstGeom prst="rect">
@@ -21706,7 +21706,7 @@
           </p:nvPr>
         </p:nvGraphicFramePr>
         <p:xfrm>
-          <a:off x="1482916" y="2649162"/>
+          <a:off x="1482916" y="2600498"/>
           <a:ext cx="6164580" cy="3873500"/>
         </p:xfrm>
         <a:graphic>
@@ -23354,7 +23354,7 @@
         </p:nvSpPr>
         <p:spPr>
           <a:xfrm>
-            <a:off x="365760" y="5054762"/>
+            <a:off x="365760" y="5133098"/>
             <a:ext cx="8412480" cy="781278"/>
           </a:xfrm>
           <a:prstGeom prst="rect">
@@ -23611,7 +23611,7 @@
           </p:nvPr>
         </p:nvGraphicFramePr>
         <p:xfrm>
-          <a:off x="1496886" y="1842998"/>
+          <a:off x="1496886" y="1813560"/>
           <a:ext cx="6136640" cy="3873500"/>
         </p:xfrm>
         <a:graphic>
@@ -25196,7 +25196,7 @@
         </p:nvSpPr>
         <p:spPr>
           <a:xfrm>
-            <a:off x="365760" y="4248598"/>
+            <a:off x="365760" y="4346160"/>
             <a:ext cx="8412480" cy="781278"/>
           </a:xfrm>
           <a:prstGeom prst="rect">
@@ -25655,7 +25655,7 @@
         </p:blipFill>
         <p:spPr>
           <a:xfrm>
-            <a:off x="2609606" y="3241029"/>
+            <a:off x="2609606" y="2087880"/>
             <a:ext cx="3924788" cy="2017346"/>
           </a:xfrm>
           <a:prstGeom prst="rect">
@@ -25964,7 +25964,7 @@
         </p:blipFill>
         <p:spPr>
           <a:xfrm>
-            <a:off x="529981" y="2949174"/>
+            <a:off x="529981" y="2087880"/>
             <a:ext cx="8084038" cy="2601058"/>
           </a:xfrm>
           <a:prstGeom prst="rect">
@@ -26141,7 +26141,7 @@
           </p:nvPr>
         </p:nvGraphicFramePr>
         <p:xfrm>
-          <a:off x="1634046" y="2100036"/>
+          <a:off x="1634046" y="2087880"/>
           <a:ext cx="5862320" cy="3873500"/>
         </p:xfrm>
         <a:graphic>
@@ -26795,7 +26795,7 @@
         </p:nvSpPr>
         <p:spPr>
           <a:xfrm>
-            <a:off x="365760" y="3353636"/>
+            <a:off x="365760" y="3468480"/>
             <a:ext cx="8412480" cy="781278"/>
           </a:xfrm>
           <a:prstGeom prst="rect">
@@ -27042,7 +27042,7 @@
           </p:nvPr>
         </p:nvGraphicFramePr>
         <p:xfrm>
-          <a:off x="1914716" y="1842998"/>
+          <a:off x="1914716" y="1813560"/>
           <a:ext cx="5300980" cy="3873500"/>
         </p:xfrm>
         <a:graphic>
@@ -27767,7 +27767,7 @@
         </p:nvSpPr>
         <p:spPr>
           <a:xfrm>
-            <a:off x="365760" y="2808598"/>
+            <a:off x="365760" y="2906160"/>
             <a:ext cx="8412480" cy="1038316"/>
           </a:xfrm>
           <a:prstGeom prst="rect">

--- a/courses/ooad/sessions/s11.pptx
+++ b/courses/ooad/sessions/s11.pptx
@@ -20148,7 +20148,7 @@
                 <a:latin typeface="맑은 고딕"/>
                 <a:ea typeface="맑은 고딕"/>
               </a:rPr>
-              <a:t>정기배송의 모델마다 </a:t>
+              <a:t>정기배송의 모델마다 줄인 </a:t>
             </a:r>
             <a:r>
               <a:rPr sz="1800" b="1">
@@ -20168,7 +20168,7 @@
                 <a:latin typeface="맑은 고딕"/>
                 <a:ea typeface="맑은 고딕"/>
               </a:rPr>
-              <a:t>과 </a:t>
+              <a:t>을 적고, 위험이 큰 곳에는 모델을 </a:t>
             </a:r>
             <a:r>
               <a:rPr sz="1800" b="1">
@@ -20178,7 +20178,7 @@
                 <a:latin typeface="맑은 고딕"/>
                 <a:ea typeface="맑은 고딕"/>
               </a:rPr>
-              <a:t>남길지</a:t>
+              <a:t>더하고</a:t>
             </a:r>
             <a:r>
               <a:rPr sz="1800" b="0">
@@ -20188,7 +20188,27 @@
                 <a:latin typeface="맑은 고딕"/>
                 <a:ea typeface="맑은 고딕"/>
               </a:rPr>
-              <a:t>를 정했다. 표의 마지막 열이 더할 모델과 멈출 모델이다.</a:t>
+              <a:t> 작은 곳에서는 </a:t>
+            </a:r>
+            <a:r>
+              <a:rPr sz="1800" b="1">
+                <a:solidFill>
+                  <a:srgbClr val="000000"/>
+                </a:solidFill>
+                <a:latin typeface="맑은 고딕"/>
+                <a:ea typeface="맑은 고딕"/>
+              </a:rPr>
+              <a:t>멈춘다</a:t>
+            </a:r>
+            <a:r>
+              <a:rPr sz="1800" b="0">
+                <a:solidFill>
+                  <a:srgbClr val="000000"/>
+                </a:solidFill>
+                <a:latin typeface="맑은 고딕"/>
+                <a:ea typeface="맑은 고딕"/>
+              </a:rPr>
+              <a:t>.</a:t>
             </a:r>
           </a:p>
         </p:txBody>
@@ -25092,7 +25112,7 @@
                 <a:latin typeface="맑은 고딕"/>
                 <a:ea typeface="맑은 고딕"/>
               </a:rPr>
-              <a:t>도 다르다. 표의 가운데 열이 그 모델이 없었다면 </a:t>
+              <a:t>도 다르다. 그 모델이 없었다면 </a:t>
             </a:r>
             <a:r>
               <a:rPr sz="1800" b="1">
@@ -25112,7 +25132,7 @@
                 <a:latin typeface="맑은 고딕"/>
                 <a:ea typeface="맑은 고딕"/>
               </a:rPr>
-              <a:t>이다.</a:t>
+              <a:t>이 그 모델을 그린 이유다.</a:t>
             </a:r>
           </a:p>
         </p:txBody>
